--- a/decks/Microsoft Foundry Agent2Agent-A2A.pptx
+++ b/decks/Microsoft Foundry Agent2Agent-A2A.pptx
@@ -146,6 +146,322 @@
 </p:presentation>
 </file>
 
+<file path=ppt/revisionInfo.xml><?xml version="1.0" encoding="utf-8"?>
+<p1510:revInfo xmlns:a="http://schemas.openxmlformats.org/drawingml/2006/main" xmlns:r="http://schemas.openxmlformats.org/officeDocument/2006/relationships" xmlns:p1510="http://schemas.microsoft.com/office/powerpoint/2015/10/main">
+  <p1510:revLst>
+    <p1510:client id="{244A24B3-42BF-30AD-7087-02C81777F94D}" v="8" dt="2026-10-15T19:35:07.712"/>
+  </p1510:revLst>
+</p1510:revInfo>
+</file>
+
+<file path=ppt/changesInfos/changesInfo1.xml><?xml version="1.0" encoding="utf-8"?>
+<pc:chgInfo xmlns:a="http://schemas.openxmlformats.org/drawingml/2006/main" xmlns:r="http://schemas.openxmlformats.org/officeDocument/2006/relationships" xmlns:ac="http://schemas.microsoft.com/office/drawing/2013/main/command" xmlns:pc="http://schemas.microsoft.com/office/powerpoint/2013/main/command">
+  <pc:docChgLst>
+    <pc:chgData name="Alex Sachelarescu" userId="S::alexsac@microsoft.com::774a4e7a-2386-4e79-97d5-603ed92c67ae" providerId="AD" clId="Web-{244A24B3-42BF-30AD-7087-02C81777F94D}"/>
+    <pc:docChg chg="modSld">
+      <pc:chgData name="Alex Sachelarescu" userId="S::alexsac@microsoft.com::774a4e7a-2386-4e79-97d5-603ed92c67ae" providerId="AD" clId="Web-{244A24B3-42BF-30AD-7087-02C81777F94D}" dt="2026-10-15T19:36:54.731" v="159"/>
+      <pc:docMkLst>
+        <pc:docMk/>
+      </pc:docMkLst>
+      <pc:sldChg chg="modNotes">
+        <pc:chgData name="Alex Sachelarescu" userId="S::alexsac@microsoft.com::774a4e7a-2386-4e79-97d5-603ed92c67ae" providerId="AD" clId="Web-{244A24B3-42BF-30AD-7087-02C81777F94D}" dt="2026-10-15T17:29:45.314" v="28"/>
+        <pc:sldMkLst>
+          <pc:docMk/>
+          <pc:sldMk cId="0" sldId="257"/>
+        </pc:sldMkLst>
+      </pc:sldChg>
+      <pc:sldChg chg="modNotes">
+        <pc:chgData name="Alex Sachelarescu" userId="S::alexsac@microsoft.com::774a4e7a-2386-4e79-97d5-603ed92c67ae" providerId="AD" clId="Web-{244A24B3-42BF-30AD-7087-02C81777F94D}" dt="2026-10-15T17:33:29.760" v="35"/>
+        <pc:sldMkLst>
+          <pc:docMk/>
+          <pc:sldMk cId="0" sldId="258"/>
+        </pc:sldMkLst>
+      </pc:sldChg>
+      <pc:sldChg chg="modSp modNotes">
+        <pc:chgData name="Alex Sachelarescu" userId="S::alexsac@microsoft.com::774a4e7a-2386-4e79-97d5-603ed92c67ae" providerId="AD" clId="Web-{244A24B3-42BF-30AD-7087-02C81777F94D}" dt="2026-10-15T17:36:19.579" v="41" actId="20577"/>
+        <pc:sldMkLst>
+          <pc:docMk/>
+          <pc:sldMk cId="0" sldId="259"/>
+        </pc:sldMkLst>
+        <pc:spChg chg="mod">
+          <ac:chgData name="Alex Sachelarescu" userId="S::alexsac@microsoft.com::774a4e7a-2386-4e79-97d5-603ed92c67ae" providerId="AD" clId="Web-{244A24B3-42BF-30AD-7087-02C81777F94D}" dt="2026-10-15T17:36:18.157" v="39" actId="20577"/>
+          <ac:spMkLst>
+            <pc:docMk/>
+            <pc:sldMk cId="0" sldId="259"/>
+            <ac:spMk id="15" creationId="{00000000-0000-0000-0000-000000000000}"/>
+          </ac:spMkLst>
+        </pc:spChg>
+        <pc:spChg chg="mod">
+          <ac:chgData name="Alex Sachelarescu" userId="S::alexsac@microsoft.com::774a4e7a-2386-4e79-97d5-603ed92c67ae" providerId="AD" clId="Web-{244A24B3-42BF-30AD-7087-02C81777F94D}" dt="2026-10-15T17:36:19.579" v="41" actId="20577"/>
+          <ac:spMkLst>
+            <pc:docMk/>
+            <pc:sldMk cId="0" sldId="259"/>
+            <ac:spMk id="19" creationId="{00000000-0000-0000-0000-000000000000}"/>
+          </ac:spMkLst>
+        </pc:spChg>
+      </pc:sldChg>
+      <pc:sldChg chg="modNotes">
+        <pc:chgData name="Alex Sachelarescu" userId="S::alexsac@microsoft.com::774a4e7a-2386-4e79-97d5-603ed92c67ae" providerId="AD" clId="Web-{244A24B3-42BF-30AD-7087-02C81777F94D}" dt="2026-10-15T17:40:18.322" v="59"/>
+        <pc:sldMkLst>
+          <pc:docMk/>
+          <pc:sldMk cId="0" sldId="260"/>
+        </pc:sldMkLst>
+      </pc:sldChg>
+      <pc:sldChg chg="modNotes">
+        <pc:chgData name="Alex Sachelarescu" userId="S::alexsac@microsoft.com::774a4e7a-2386-4e79-97d5-603ed92c67ae" providerId="AD" clId="Web-{244A24B3-42BF-30AD-7087-02C81777F94D}" dt="2026-10-15T17:45:24.426" v="67"/>
+        <pc:sldMkLst>
+          <pc:docMk/>
+          <pc:sldMk cId="0" sldId="261"/>
+        </pc:sldMkLst>
+      </pc:sldChg>
+      <pc:sldChg chg="modNotes">
+        <pc:chgData name="Alex Sachelarescu" userId="S::alexsac@microsoft.com::774a4e7a-2386-4e79-97d5-603ed92c67ae" providerId="AD" clId="Web-{244A24B3-42BF-30AD-7087-02C81777F94D}" dt="2026-10-15T17:49:45.529" v="71"/>
+        <pc:sldMkLst>
+          <pc:docMk/>
+          <pc:sldMk cId="0" sldId="262"/>
+        </pc:sldMkLst>
+      </pc:sldChg>
+      <pc:sldChg chg="modNotes">
+        <pc:chgData name="Alex Sachelarescu" userId="S::alexsac@microsoft.com::774a4e7a-2386-4e79-97d5-603ed92c67ae" providerId="AD" clId="Web-{244A24B3-42BF-30AD-7087-02C81777F94D}" dt="2026-10-15T18:06:19.473" v="74"/>
+        <pc:sldMkLst>
+          <pc:docMk/>
+          <pc:sldMk cId="0" sldId="265"/>
+        </pc:sldMkLst>
+      </pc:sldChg>
+      <pc:sldChg chg="modNotes">
+        <pc:chgData name="Alex Sachelarescu" userId="S::alexsac@microsoft.com::774a4e7a-2386-4e79-97d5-603ed92c67ae" providerId="AD" clId="Web-{244A24B3-42BF-30AD-7087-02C81777F94D}" dt="2026-10-15T19:18:10.849" v="128"/>
+        <pc:sldMkLst>
+          <pc:docMk/>
+          <pc:sldMk cId="0" sldId="266"/>
+        </pc:sldMkLst>
+      </pc:sldChg>
+      <pc:sldChg chg="modNotes">
+        <pc:chgData name="Alex Sachelarescu" userId="S::alexsac@microsoft.com::774a4e7a-2386-4e79-97d5-603ed92c67ae" providerId="AD" clId="Web-{244A24B3-42BF-30AD-7087-02C81777F94D}" dt="2026-10-15T19:21:42.466" v="129"/>
+        <pc:sldMkLst>
+          <pc:docMk/>
+          <pc:sldMk cId="0" sldId="267"/>
+        </pc:sldMkLst>
+      </pc:sldChg>
+      <pc:sldChg chg="modNotes">
+        <pc:chgData name="Alex Sachelarescu" userId="S::alexsac@microsoft.com::774a4e7a-2386-4e79-97d5-603ed92c67ae" providerId="AD" clId="Web-{244A24B3-42BF-30AD-7087-02C81777F94D}" dt="2026-10-15T19:29:57.763" v="149"/>
+        <pc:sldMkLst>
+          <pc:docMk/>
+          <pc:sldMk cId="0" sldId="268"/>
+        </pc:sldMkLst>
+      </pc:sldChg>
+      <pc:sldChg chg="modNotes">
+        <pc:chgData name="Alex Sachelarescu" userId="S::alexsac@microsoft.com::774a4e7a-2386-4e79-97d5-603ed92c67ae" providerId="AD" clId="Web-{244A24B3-42BF-30AD-7087-02C81777F94D}" dt="2026-10-15T19:34:26.742" v="150"/>
+        <pc:sldMkLst>
+          <pc:docMk/>
+          <pc:sldMk cId="0" sldId="269"/>
+        </pc:sldMkLst>
+      </pc:sldChg>
+      <pc:sldChg chg="mod modShow">
+        <pc:chgData name="Alex Sachelarescu" userId="S::alexsac@microsoft.com::774a4e7a-2386-4e79-97d5-603ed92c67ae" providerId="AD" clId="Web-{244A24B3-42BF-30AD-7087-02C81777F94D}" dt="2026-10-15T19:34:46.602" v="151"/>
+        <pc:sldMkLst>
+          <pc:docMk/>
+          <pc:sldMk cId="0" sldId="270"/>
+        </pc:sldMkLst>
+      </pc:sldChg>
+      <pc:sldChg chg="mod modShow">
+        <pc:chgData name="Alex Sachelarescu" userId="S::alexsac@microsoft.com::774a4e7a-2386-4e79-97d5-603ed92c67ae" providerId="AD" clId="Web-{244A24B3-42BF-30AD-7087-02C81777F94D}" dt="2026-10-15T19:35:07.712" v="152"/>
+        <pc:sldMkLst>
+          <pc:docMk/>
+          <pc:sldMk cId="0" sldId="273"/>
+        </pc:sldMkLst>
+      </pc:sldChg>
+      <pc:sldChg chg="modNotes">
+        <pc:chgData name="Alex Sachelarescu" userId="S::alexsac@microsoft.com::774a4e7a-2386-4e79-97d5-603ed92c67ae" providerId="AD" clId="Web-{244A24B3-42BF-30AD-7087-02C81777F94D}" dt="2026-10-15T19:36:54.731" v="159"/>
+        <pc:sldMkLst>
+          <pc:docMk/>
+          <pc:sldMk cId="0" sldId="274"/>
+        </pc:sldMkLst>
+      </pc:sldChg>
+    </pc:docChg>
+  </pc:docChgLst>
+  <pc:docChgLst>
+    <pc:chgData clId="Web-{74D29D05-626B-4F07-8687-E1721E85C19D}"/>
+    <pc:docChg chg="modSld">
+      <pc:chgData name="" userId="" providerId="" clId="Web-{74D29D05-626B-4F07-8687-E1721E85C19D}" dt="2026-10-14T13:45:26.849" v="0" actId="34807"/>
+      <pc:docMkLst>
+        <pc:docMk/>
+      </pc:docMkLst>
+      <pc:sldChg chg="modNotesTx">
+        <pc:chgData name="" userId="" providerId="" clId="Web-{74D29D05-626B-4F07-8687-E1721E85C19D}" dt="2026-10-14T13:45:26.849" v="0" actId="34807"/>
+        <pc:sldMkLst>
+          <pc:docMk/>
+          <pc:sldMk cId="0" sldId="256"/>
+        </pc:sldMkLst>
+      </pc:sldChg>
+      <pc:sldChg chg="modNotesTx">
+        <pc:chgData name="" userId="" providerId="" clId="Web-{74D29D05-626B-4F07-8687-E1721E85C19D}" dt="2026-10-14T13:45:26.849" v="0" actId="34807"/>
+        <pc:sldMkLst>
+          <pc:docMk/>
+          <pc:sldMk cId="0" sldId="257"/>
+        </pc:sldMkLst>
+      </pc:sldChg>
+      <pc:sldChg chg="modNotesTx">
+        <pc:chgData name="" userId="" providerId="" clId="Web-{74D29D05-626B-4F07-8687-E1721E85C19D}" dt="2026-10-14T13:45:26.849" v="0" actId="34807"/>
+        <pc:sldMkLst>
+          <pc:docMk/>
+          <pc:sldMk cId="0" sldId="258"/>
+        </pc:sldMkLst>
+      </pc:sldChg>
+      <pc:sldChg chg="modNotesTx">
+        <pc:chgData name="" userId="" providerId="" clId="Web-{74D29D05-626B-4F07-8687-E1721E85C19D}" dt="2026-10-14T13:45:26.849" v="0" actId="34807"/>
+        <pc:sldMkLst>
+          <pc:docMk/>
+          <pc:sldMk cId="0" sldId="259"/>
+        </pc:sldMkLst>
+      </pc:sldChg>
+      <pc:sldChg chg="modSp modNotesTx">
+        <pc:chgData name="" userId="" providerId="" clId="Web-{74D29D05-626B-4F07-8687-E1721E85C19D}" dt="2026-10-14T13:45:26.849" v="0" actId="34807"/>
+        <pc:sldMkLst>
+          <pc:docMk/>
+          <pc:sldMk cId="0" sldId="260"/>
+        </pc:sldMkLst>
+        <pc:spChg chg="mod">
+          <ac:chgData name="" userId="" providerId="" clId="Web-{74D29D05-626B-4F07-8687-E1721E85C19D}" dt="2026-10-14T13:45:26.849" v="0" actId="34807"/>
+          <ac:spMkLst>
+            <pc:docMk/>
+            <pc:sldMk cId="0" sldId="260"/>
+            <ac:spMk id="10" creationId="{00000000-0000-0000-0000-000000000000}"/>
+          </ac:spMkLst>
+        </pc:spChg>
+      </pc:sldChg>
+      <pc:sldChg chg="modNotesTx">
+        <pc:chgData name="" userId="" providerId="" clId="Web-{74D29D05-626B-4F07-8687-E1721E85C19D}" dt="2026-10-14T13:45:26.849" v="0" actId="34807"/>
+        <pc:sldMkLst>
+          <pc:docMk/>
+          <pc:sldMk cId="0" sldId="261"/>
+        </pc:sldMkLst>
+      </pc:sldChg>
+      <pc:sldChg chg="modNotesTx">
+        <pc:chgData name="" userId="" providerId="" clId="Web-{74D29D05-626B-4F07-8687-E1721E85C19D}" dt="2026-10-14T13:45:26.849" v="0" actId="34807"/>
+        <pc:sldMkLst>
+          <pc:docMk/>
+          <pc:sldMk cId="0" sldId="262"/>
+        </pc:sldMkLst>
+      </pc:sldChg>
+      <pc:sldChg chg="modNotesTx">
+        <pc:chgData name="" userId="" providerId="" clId="Web-{74D29D05-626B-4F07-8687-E1721E85C19D}" dt="2026-10-14T13:45:26.849" v="0" actId="34807"/>
+        <pc:sldMkLst>
+          <pc:docMk/>
+          <pc:sldMk cId="0" sldId="263"/>
+        </pc:sldMkLst>
+      </pc:sldChg>
+      <pc:sldChg chg="modNotesTx">
+        <pc:chgData name="" userId="" providerId="" clId="Web-{74D29D05-626B-4F07-8687-E1721E85C19D}" dt="2026-10-14T13:45:26.849" v="0" actId="34807"/>
+        <pc:sldMkLst>
+          <pc:docMk/>
+          <pc:sldMk cId="0" sldId="264"/>
+        </pc:sldMkLst>
+      </pc:sldChg>
+      <pc:sldChg chg="modNotesTx">
+        <pc:chgData name="" userId="" providerId="" clId="Web-{74D29D05-626B-4F07-8687-E1721E85C19D}" dt="2026-10-14T13:45:26.849" v="0" actId="34807"/>
+        <pc:sldMkLst>
+          <pc:docMk/>
+          <pc:sldMk cId="0" sldId="265"/>
+        </pc:sldMkLst>
+      </pc:sldChg>
+      <pc:sldChg chg="modNotesTx">
+        <pc:chgData name="" userId="" providerId="" clId="Web-{74D29D05-626B-4F07-8687-E1721E85C19D}" dt="2026-10-14T13:45:26.849" v="0" actId="34807"/>
+        <pc:sldMkLst>
+          <pc:docMk/>
+          <pc:sldMk cId="0" sldId="266"/>
+        </pc:sldMkLst>
+      </pc:sldChg>
+      <pc:sldChg chg="modNotesTx">
+        <pc:chgData name="" userId="" providerId="" clId="Web-{74D29D05-626B-4F07-8687-E1721E85C19D}" dt="2026-10-14T13:45:26.849" v="0" actId="34807"/>
+        <pc:sldMkLst>
+          <pc:docMk/>
+          <pc:sldMk cId="0" sldId="267"/>
+        </pc:sldMkLst>
+      </pc:sldChg>
+      <pc:sldChg chg="modNotesTx">
+        <pc:chgData name="" userId="" providerId="" clId="Web-{74D29D05-626B-4F07-8687-E1721E85C19D}" dt="2026-10-14T13:45:26.849" v="0" actId="34807"/>
+        <pc:sldMkLst>
+          <pc:docMk/>
+          <pc:sldMk cId="0" sldId="268"/>
+        </pc:sldMkLst>
+      </pc:sldChg>
+      <pc:sldChg chg="modNotesTx">
+        <pc:chgData name="" userId="" providerId="" clId="Web-{74D29D05-626B-4F07-8687-E1721E85C19D}" dt="2026-10-14T13:45:26.849" v="0" actId="34807"/>
+        <pc:sldMkLst>
+          <pc:docMk/>
+          <pc:sldMk cId="0" sldId="269"/>
+        </pc:sldMkLst>
+      </pc:sldChg>
+      <pc:sldChg chg="modNotesTx">
+        <pc:chgData name="" userId="" providerId="" clId="Web-{74D29D05-626B-4F07-8687-E1721E85C19D}" dt="2026-10-14T13:45:26.849" v="0" actId="34807"/>
+        <pc:sldMkLst>
+          <pc:docMk/>
+          <pc:sldMk cId="0" sldId="270"/>
+        </pc:sldMkLst>
+      </pc:sldChg>
+      <pc:sldChg chg="modNotesTx">
+        <pc:chgData name="" userId="" providerId="" clId="Web-{74D29D05-626B-4F07-8687-E1721E85C19D}" dt="2026-10-14T13:45:26.849" v="0" actId="34807"/>
+        <pc:sldMkLst>
+          <pc:docMk/>
+          <pc:sldMk cId="0" sldId="271"/>
+        </pc:sldMkLst>
+      </pc:sldChg>
+      <pc:sldChg chg="modNotesTx">
+        <pc:chgData name="" userId="" providerId="" clId="Web-{74D29D05-626B-4F07-8687-E1721E85C19D}" dt="2026-10-14T13:45:26.849" v="0" actId="34807"/>
+        <pc:sldMkLst>
+          <pc:docMk/>
+          <pc:sldMk cId="0" sldId="272"/>
+        </pc:sldMkLst>
+      </pc:sldChg>
+      <pc:sldChg chg="modSp modNotesTx">
+        <pc:chgData name="" userId="" providerId="" clId="Web-{74D29D05-626B-4F07-8687-E1721E85C19D}" dt="2026-10-14T13:45:26.849" v="0" actId="34807"/>
+        <pc:sldMkLst>
+          <pc:docMk/>
+          <pc:sldMk cId="0" sldId="273"/>
+        </pc:sldMkLst>
+        <pc:spChg chg="mod">
+          <ac:chgData name="" userId="" providerId="" clId="Web-{74D29D05-626B-4F07-8687-E1721E85C19D}" dt="2026-10-14T13:45:26.849" v="0" actId="34807"/>
+          <ac:spMkLst>
+            <pc:docMk/>
+            <pc:sldMk cId="0" sldId="273"/>
+            <ac:spMk id="12" creationId="{00000000-0000-0000-0000-000000000000}"/>
+          </ac:spMkLst>
+        </pc:spChg>
+        <pc:spChg chg="mod">
+          <ac:chgData name="" userId="" providerId="" clId="Web-{74D29D05-626B-4F07-8687-E1721E85C19D}" dt="2026-10-14T13:45:26.849" v="0" actId="34807"/>
+          <ac:spMkLst>
+            <pc:docMk/>
+            <pc:sldMk cId="0" sldId="273"/>
+            <ac:spMk id="36" creationId="{00000000-0000-0000-0000-000000000000}"/>
+          </ac:spMkLst>
+        </pc:spChg>
+      </pc:sldChg>
+      <pc:sldChg chg="modNotesTx">
+        <pc:chgData name="" userId="" providerId="" clId="Web-{74D29D05-626B-4F07-8687-E1721E85C19D}" dt="2026-10-14T13:45:26.849" v="0" actId="34807"/>
+        <pc:sldMkLst>
+          <pc:docMk/>
+          <pc:sldMk cId="0" sldId="274"/>
+        </pc:sldMkLst>
+      </pc:sldChg>
+      <pc:sldChg chg="modNotesTx">
+        <pc:chgData name="" userId="" providerId="" clId="Web-{74D29D05-626B-4F07-8687-E1721E85C19D}" dt="2026-10-14T13:45:26.849" v="0" actId="34807"/>
+        <pc:sldMkLst>
+          <pc:docMk/>
+          <pc:sldMk cId="0" sldId="275"/>
+        </pc:sldMkLst>
+      </pc:sldChg>
+      <pc:sldChg chg="modNotesTx">
+        <pc:chgData name="" userId="" providerId="" clId="Web-{74D29D05-626B-4F07-8687-E1721E85C19D}" dt="2026-10-14T13:45:26.849" v="0" actId="34807"/>
+        <pc:sldMkLst>
+          <pc:docMk/>
+          <pc:sldMk cId="0" sldId="276"/>
+        </pc:sldMkLst>
+      </pc:sldChg>
+    </pc:docChg>
+  </pc:docChgLst>
+</pc:chgInfo>
+</file>
+
 <file path=ppt/notesMasters/notesMaster1.xml><?xml version="1.0" encoding="utf-8"?>
 <p:notesMaster xmlns:a="http://schemas.openxmlformats.org/drawingml/2006/main" xmlns:r="http://schemas.openxmlformats.org/officeDocument/2006/relationships" xmlns:p="http://schemas.openxmlformats.org/presentationml/2006/main">
   <p:cSld>
@@ -316,28 +632,19 @@
           <a:lstStyle/>
           <a:p>
             <a:r>
-              <a:t>This session covers the Agent2Agent protocol at specification level and its implementation in Microsoft Foundry Agent Service. The objective is that participants can evaluate A2A against alternative integration mechanisms, and configure it correctly.</a:t>
-            </a:r>
-          </a:p>
-          <a:p>
-            <a:r>
-              <a:t>Three points of context. A2A is a vendor-neutral specification. It originated at Google in April 2025, transferred to the Linux Foundation in June 2025, and since 27 August 2026 has been a Growth Stage project at the Agentic AI Foundation, which also hosts the Model Context Protocol. Microsoft holds one of eight technical steering committee seats.</a:t>
-            </a:r>
-          </a:p>
-          <a:p>
-            <a:r>
-              <a:t>Version precision matters throughout. Version 1.0 introduced breaking changes to method naming, the content model and enumeration values relative to version 0.3. Published material predating March 2026 describes the earlier wire format. Unless stated otherwise, all content here describes version 1.0.</a:t>
-            </a:r>
-          </a:p>
-          <a:p>
-            <a:r>
-              <a:t>Microsoft Foundry implements two distinct capabilities: outbound invocation of a remote agent, and inbound exposure of a Foundry agent. They carry different release status and are addressed separately in section three.</a:t>
-            </a:r>
-          </a:p>
-          <a:p>
-            <a:r>
-              <a:t>Anticipated question: does A2A supersede the Model Context Protocol? It does not. Section five addresses the distinction in detail.</a:t>
-            </a:r>
+              <a:rPr lang="en-US"/>
+              <a:t>This session covers the Agent2Agent protocol, A2A, at specification level, and its implementation in Microsoft Foundry Agent Service. The objective is that participants can evaluate A2A against the alternative integration mechanisms and configure it correctly.
+Three points of context set the frame.
+First, A2A is a vendor-neutral specification.
+It originated at Google in April 2025, moved to the Linux Foundation in June 2025, and since 27 August 2026 has been a Growth Stage project at the Agentic AI Foundation, which also hosts the Model Context Protocol. Microsoft holds one of eight technical steering committee seats.
+Second, version precision matters throughout.
+Version 1.0 introduced breaking changes to method naming, the content model and enumeration values compared with version 0.3. Published material from before March 2026 describes the earlier wire format. Unless stated otherwise, everything in this session describes version 1.0.
+Third, Microsoft Foundry implements two distinct capabilities.
+Outbound invocation lets a Foundry agent call a remote agent; inbound exposure lets external agents call a Foundry agent. They carry different release status and are covered separately in section three.
+A common opening question is whether A2A replaces the Model Context Protocol. It does not: the two address different problems, and section five covers the distinction in detail.
+The key takeaway is that A2A is an open standard first and a Foundry feature second, so the session starts with the specification before moving to the implementation.</a:t>
+            </a:r>
+            <a:endParaRPr/>
           </a:p>
         </p:txBody>
       </p:sp>
@@ -406,28 +713,126 @@
           <a:lstStyle/>
           <a:p>
             <a:r>
-              <a:t>The mode is determined by the expected duration of the remote work and by whether the calling process can hold a connection for that duration.</a:t>
-            </a:r>
-          </a:p>
-          <a:p>
-            <a:r>
-              <a:t>The synchronous mode is governed by the returnImmediately parameter, and the specification is precise: with the value false, the operation waits until the task is terminal or interrupted. Interrupted counts as a return condition, which is why an agent requesting additional input does not block indefinitely. Version 1.0 replaced the earlier blocking parameter with returnImmediately and inverted its sense, which is a common porting defect.</a:t>
-            </a:r>
-          </a:p>
-          <a:p>
-            <a:r>
-              <a:t>Streaming uses Server-Sent Events. Ordering is normative — events must be delivered in the order generated and must not be reordered — and multiple concurrent subscriptions to one task each receive the full event sequence. Reconnection returns a complete Task object as the first event, by design, so that no state is lost between a read and a subscription.</a:t>
-            </a:r>
-          </a:p>
-          <a:p>
-            <a:r>
-              <a:t>Push notification is the mode with a security consideration. The specification warns that a server should not issue requests to an arbitrary client-supplied URL, since this is a server-side request forgery and traffic amplification vector. Domain allow-listing and ownership verification are required.</a:t>
-            </a:r>
-          </a:p>
-          <a:p>
-            <a:r>
-              <a:t>Anticipated question: does the Foundry constraint prevent long-running delegation? In practice yes; the remote unit of work must fit within the caller's timeout.</a:t>
-            </a:r>
+              <a:rPr lang="en-US"/>
+              <a:t>A2A supports three interaction modes. The choice depends on </a:t>
+            </a:r>
+            <a:r>
+              <a:rPr lang="en-US" b="1"/>
+              <a:t>how long the task may run</a:t>
+            </a:r>
+            <a:r>
+              <a:rPr lang="en-US"/>
+              <a:t> and </a:t>
+            </a:r>
+            <a:r>
+              <a:rPr lang="en-US" b="1"/>
+              <a:t>whether the caller can keep a connection open</a:t>
+            </a:r>
+            <a:r>
+              <a:rPr lang="en-US"/>
+              <a:t>.</a:t>
+            </a:r>
+          </a:p>
+          <a:p>
+            <a:r>
+              <a:rPr lang="en-US" b="1"/>
+              <a:t>Synchronous mode</a:t>
+            </a:r>
+            <a:r>
+              <a:rPr lang="en-US"/>
+              <a:t> is the simplest. The caller sends one request and waits until the task completes, fails or requires additional input. It fits short, predictable work, but the real limit is the timeout imposed by the client, gateway or network.</a:t>
+            </a:r>
+          </a:p>
+          <a:p>
+            <a:r>
+              <a:rPr lang="en-US" b="1"/>
+              <a:t>Streaming mode</a:t>
+            </a:r>
+            <a:r>
+              <a:rPr lang="en-US"/>
+              <a:t> keeps the connection open using Server-Sent Events. The agent can send ordered status updates and incremental artefacts while work is progressing. This is useful for interactive experiences where the user needs immediate feedback. If the connection drops, recovery uses the persisted task state rather than replaying from an arbitrary event offset.</a:t>
+            </a:r>
+          </a:p>
+          <a:p>
+            <a:r>
+              <a:rPr lang="en-US" b="1"/>
+              <a:t>Asynchronous mode</a:t>
+            </a:r>
+            <a:r>
+              <a:rPr lang="en-US"/>
+              <a:t> is designed for long-running work without a permanent connection. The client registers a webhook, and the server sends authenticated notifications when the task state changes. The receiving system must validate every notification before processing it.</a:t>
+            </a:r>
+          </a:p>
+          <a:p>
+            <a:r>
+              <a:rPr lang="en-US"/>
+              <a:t>The selected mode must be declared in the Agent Card. Streaming requires the streaming capability; asynchronous delivery requires push-notification support and a webhook authentication scheme.</a:t>
+            </a:r>
+          </a:p>
+          <a:p>
+            <a:r>
+              <a:rPr lang="en-US"/>
+              <a:t>The key takeaway is:</a:t>
+            </a:r>
+          </a:p>
+          <a:p>
+            <a:pPr marL="171450" indent="-171450">
+              <a:buFont typeface="Arial"/>
+              <a:buChar char="•"/>
+            </a:pPr>
+            <a:r>
+              <a:rPr lang="en-US" b="1"/>
+              <a:t>Synchronous</a:t>
+            </a:r>
+            <a:r>
+              <a:rPr lang="en-US"/>
+              <a:t> for short tasks where the caller can wait.</a:t>
+            </a:r>
+          </a:p>
+          <a:p>
+            <a:pPr marL="171450" indent="-171450">
+              <a:buFont typeface="Arial"/>
+              <a:buChar char="•"/>
+            </a:pPr>
+            <a:r>
+              <a:rPr lang="en-US" b="1"/>
+              <a:t>Streaming</a:t>
+            </a:r>
+            <a:r>
+              <a:rPr lang="en-US"/>
+              <a:t> for live progress over an open connection.</a:t>
+            </a:r>
+          </a:p>
+          <a:p>
+            <a:pPr marL="171450" indent="-171450">
+              <a:buFont typeface="Arial"/>
+              <a:buChar char="•"/>
+            </a:pPr>
+            <a:r>
+              <a:rPr lang="en-US" b="1"/>
+              <a:t>Asynchronous</a:t>
+            </a:r>
+            <a:r>
+              <a:rPr lang="en-US"/>
+              <a:t> for long-running, system-to-system work.</a:t>
+            </a:r>
+          </a:p>
+          <a:p>
+            <a:r>
+              <a:rPr lang="en-US" b="1">
+                <a:solidFill>
+                  <a:srgbClr val="FF0000"/>
+                </a:solidFill>
+              </a:rPr>
+              <a:t>For Microsoft Foundry specifically, the current A2A target integration supports only synchronous JSON-RPC with text content.</a:t>
+            </a:r>
+            <a:r>
+              <a:rPr lang="en-US"/>
+              <a:t> Remote work must therefore finish within the caller’s timeout, which is an important constraint when designing the delegated task.</a:t>
+            </a:r>
+          </a:p>
+          <a:p>
+            <a:endParaRPr lang="en-US" dirty="0"/>
           </a:p>
         </p:txBody>
       </p:sp>
@@ -496,28 +901,155 @@
           <a:lstStyle/>
           <a:p>
             <a:r>
-              <a:t>These are two independent capabilities with different release status, and conflating them is the most frequent misunderstanding in design review.</a:t>
-            </a:r>
-          </a:p>
-          <a:p>
-            <a:r>
-              <a:t>Steps one and two describe the inbound path, in which the Foundry agent acts as the A2A server. An external client retrieves the Agent Card that Foundry publishes, authenticates with Microsoft Entra ID, and submits a task to the endpoint under the agent's protocols path. Inbound exposure requires the responses protocol, which prompt agents support by default, and is currently in preview.</a:t>
-            </a:r>
-          </a:p>
-          <a:p>
-            <a:r>
-              <a:t>Steps three and four describe the outbound path, in which the Foundry agent acts as the A2A client. The agent carries an a2a tool that resolves a project connection of kind RemoteA2A, holding the target endpoint, the audience and the credential. This direction is generally available at protocol version 1.0.</a:t>
-            </a:r>
-          </a:p>
-          <a:p>
-            <a:r>
-              <a:t>The identity layer at the base of the diagram is not decorative. On the Foundry side every A2A endpoint requires Entra ID authentication and anonymous retrieval of the agent card is not permitted, which differs from the open protocol where anonymous card retrieval is normal.</a:t>
-            </a:r>
-          </a:p>
-          <a:p>
-            <a:r>
-              <a:t>Anticipated question: can one Foundry agent call another? Yes — expose the target for inbound A2A and configure a connection to it.</a:t>
-            </a:r>
+              <a:rPr lang="en-US"/>
+              <a:t>Microsoft Foundry supports A2A in </a:t>
+            </a:r>
+            <a:r>
+              <a:rPr lang="en-US" b="1"/>
+              <a:t>two independent directions</a:t>
+            </a:r>
+            <a:r>
+              <a:rPr lang="en-US"/>
+              <a:t>: inbound exposure and outbound delegation. A Foundry agent can use either capability or both.</a:t>
+            </a:r>
+          </a:p>
+          <a:p>
+            <a:r>
+              <a:rPr lang="en-US" b="1"/>
+              <a:t>Inbound: the Foundry agent acts as the A2A server.</a:t>
+            </a:r>
+          </a:p>
+          <a:p>
+            <a:r>
+              <a:rPr lang="en-US"/>
+              <a:t>An external A2A client first retrieves the agent’s published </a:t>
+            </a:r>
+            <a:r>
+              <a:rPr lang="en-US" b="1"/>
+              <a:t>Agent Card</a:t>
+            </a:r>
+            <a:r>
+              <a:rPr lang="en-US"/>
+              <a:t>. The client then authenticates with Microsoft Entra ID and submits a task to the agent’s A2A endpoint.</a:t>
+            </a:r>
+          </a:p>
+          <a:p>
+            <a:r>
+              <a:rPr lang="en-US"/>
+              <a:t>Foundry translates that A2A request into the agent’s native Responses-based runtime. This allows an external agent to invoke the Foundry agent through a standard A2A contract rather than a proprietary integration.</a:t>
+            </a:r>
+          </a:p>
+          <a:p>
+            <a:r>
+              <a:rPr lang="en-US" b="1"/>
+              <a:t>Outbound: the Foundry agent acts as the A2A client.</a:t>
+            </a:r>
+          </a:p>
+          <a:p>
+            <a:r>
+              <a:rPr lang="en-US"/>
+              <a:t>The Foundry agent invokes its </a:t>
+            </a:r>
+            <a:r>
+              <a:rPr lang="en-US" b="1"/>
+              <a:t>A2A tool</a:t>
+            </a:r>
+            <a:r>
+              <a:rPr lang="en-US"/>
+              <a:t>. That tool resolves a RemoteA2A project connection containing the remote endpoint and credential, then delegates the task to the external A2A agent.</a:t>
+            </a:r>
+          </a:p>
+          <a:p>
+            <a:r>
+              <a:rPr lang="en-US"/>
+              <a:t>The remote agent can be implemented with any vendor or framework, provided it supports the compatible A2A contract.</a:t>
+            </a:r>
+          </a:p>
+          <a:p>
+            <a:r>
+              <a:rPr lang="en-US" dirty="0"/>
+              <a:t>Identity spans both paths. Foundry can use</a:t>
+            </a:r>
+            <a:r>
+              <a:rPr lang="en-US" b="1" dirty="0"/>
+              <a:t> agent identity, project-managed identity or OAuth identity passthrough</a:t>
+            </a:r>
+            <a:r>
+              <a:rPr lang="en-US" dirty="0"/>
+              <a:t>, depending on the connection design. Every Foundry A2A endpoint requires Microsoft Entra authentication, so anonymous Agent Card retrieval is not supported.</a:t>
+            </a:r>
+            <a:r>
+              <a:rPr lang="en-US" b="1" dirty="0"/>
+              <a:t> And that is why Inbound A2A is still in preview - Inbound Foundry A2A endpoints require Microsoft Entra ID authentication, including Agent Card retrieval. External agents therefore need an Entra-</a:t>
+            </a:r>
+            <a:r>
+              <a:rPr lang="en-US" b="1" dirty="0" err="1"/>
+              <a:t>recognised</a:t>
+            </a:r>
+            <a:r>
+              <a:rPr lang="en-US" b="1" dirty="0"/>
+              <a:t> user or service identity with access to the target agent.</a:t>
+            </a:r>
+          </a:p>
+          <a:p>
+            <a:endParaRPr lang="en-US" dirty="0"/>
+          </a:p>
+          <a:p>
+            <a:r>
+              <a:rPr lang="en-US"/>
+              <a:t>The key takeaway is the separation of concerns:</a:t>
+            </a:r>
+          </a:p>
+          <a:p>
+            <a:pPr marL="171450" indent="-171450">
+              <a:buFont typeface="Arial"/>
+              <a:buChar char="•"/>
+            </a:pPr>
+            <a:r>
+              <a:rPr lang="en-US" b="1"/>
+              <a:t>Inbound A2A</a:t>
+            </a:r>
+            <a:r>
+              <a:rPr lang="en-US"/>
+              <a:t> exposes a Foundry agent to external clients.</a:t>
+            </a:r>
+          </a:p>
+          <a:p>
+            <a:pPr marL="171450" indent="-171450">
+              <a:buFont typeface="Arial"/>
+              <a:buChar char="•"/>
+            </a:pPr>
+            <a:r>
+              <a:rPr lang="en-US" b="1"/>
+              <a:t>Outbound A2A</a:t>
+            </a:r>
+            <a:r>
+              <a:rPr lang="en-US"/>
+              <a:t> lets a Foundry agent delegate work to remote agents.</a:t>
+            </a:r>
+          </a:p>
+          <a:p>
+            <a:pPr marL="171450" indent="-171450">
+              <a:buFont typeface="Arial"/>
+              <a:buChar char="•"/>
+            </a:pPr>
+            <a:r>
+              <a:rPr lang="en-US" b="1"/>
+              <a:t>Microsoft Entra ID</a:t>
+            </a:r>
+            <a:r>
+              <a:rPr lang="en-US"/>
+              <a:t> provides the trust boundary across both paths.</a:t>
+            </a:r>
+          </a:p>
+          <a:p>
+            <a:r>
+              <a:rPr lang="en-US"/>
+              <a:t>The inbound A2A endpoint is marked as preview, so regional availability, supported protocol features and production support commitments should be validated before adoption.</a:t>
+            </a:r>
+          </a:p>
+          <a:p>
+            <a:endParaRPr lang="en-US" dirty="0"/>
           </a:p>
         </p:txBody>
       </p:sp>
@@ -586,28 +1118,127 @@
           <a:lstStyle/>
           <a:p>
             <a:r>
-              <a:t>Outbound integration is a configuration exercise rather than a development one. The decisions that matter are held in the connection, not in the agent code.</a:t>
-            </a:r>
-          </a:p>
-          <a:p>
-            <a:r>
-              <a:t>On the connection: the authentication type is the significant choice, selected from key-based, the agent's own Entra identity, the project managed identity, OAuth identity passthrough, or unauthenticated. Only OAuth identity passthrough preserves the calling user's context to the remote agent. Where the remote side enforces per-user authorisation, no other option is functionally adequate, and this should be established before development rather than at review.</a:t>
-            </a:r>
-          </a:p>
-          <a:p>
-            <a:r>
-              <a:t>On the tool definition: send_credentials_for_agent_card defaults to false, meaning the card is retrieved anonymously. It must be set to true where the remote agent protects its card path — which, as noted, Microsoft Foundry itself does. Credentials are transmitted only to the host named in base_url and only over HTTPS.</a:t>
-            </a:r>
-          </a:p>
-          <a:p>
-            <a:r>
-              <a:t>On versioning: the generally available tool type is a2a. Note that the Azure Developer CLI toolbox flow and several published samples still create the preview type at protocol 0.3.</a:t>
-            </a:r>
-          </a:p>
-          <a:p>
-            <a:r>
-              <a:t>Anticipated question: how many such tools can one agent carry? The documented limit is 128 registered tools per agent, with no A2A-specific quota published.</a:t>
-            </a:r>
+              <a:rPr lang="en-US"/>
+              <a:t>Outbound A2A integration allows a Foundry agent to delegate a task to a remote, A2A-compatible agent. The configuration has three layers.</a:t>
+            </a:r>
+          </a:p>
+          <a:p>
+            <a:r>
+              <a:rPr lang="en-US" b="1"/>
+              <a:t>First, the project connection.</a:t>
+            </a:r>
+            <a:br>
+              <a:rPr lang="en-US" b="1" dirty="0"/>
+            </a:br>
+            <a:r>
+              <a:rPr lang="en-US" b="1"/>
+              <a:t> A </a:t>
+            </a:r>
+            <a:r>
+              <a:rPr lang="en-US"/>
+              <a:t>RemoteA2A connection stores the remote endpoint and authentication configuration. This separates credentials and connectivity from the agent’s instructions and code.</a:t>
+            </a:r>
+          </a:p>
+          <a:p>
+            <a:r>
+              <a:rPr lang="en-US" b="1"/>
+              <a:t>Second, the tool definition.</a:t>
+            </a:r>
+            <a:br>
+              <a:rPr lang="en-US" b="1" dirty="0"/>
+            </a:br>
+            <a:r>
+              <a:rPr lang="en-US" b="1"/>
+              <a:t> The A2A tool references that project connection and selects protocol version 1.0. Optional settings can specify the base URL and Agent Card path.</a:t>
+            </a:r>
+          </a:p>
+          <a:p>
+            <a:r>
+              <a:rPr lang="en-US" b="1"/>
+              <a:t>Third, the agent version.</a:t>
+            </a:r>
+            <a:br>
+              <a:rPr lang="en-US" b="1" dirty="0"/>
+            </a:br>
+            <a:r>
+              <a:rPr lang="en-US" b="1"/>
+              <a:t> The tool is attached to the agent definition, and a new agent version is created. Published agents access it through Toolbox rather than directly.</a:t>
+            </a:r>
+          </a:p>
+          <a:p>
+            <a:r>
+              <a:rPr lang="en-US"/>
+              <a:t>At runtime, the Foundry agent decides when delegation is required, invokes the A2A tool, and the connection supplies the endpoint and credentials needed to call the remote agent.</a:t>
+            </a:r>
+          </a:p>
+          <a:p>
+            <a:r>
+              <a:rPr lang="en-US"/>
+              <a:t>The key architectural principle is separation of concerns:</a:t>
+            </a:r>
+          </a:p>
+          <a:p>
+            <a:pPr marL="171450" indent="-171450">
+              <a:buFont typeface="Arial"/>
+              <a:buChar char="•"/>
+            </a:pPr>
+            <a:r>
+              <a:rPr lang="en-US"/>
+              <a:t>The </a:t>
+            </a:r>
+            <a:r>
+              <a:rPr lang="en-US" b="1"/>
+              <a:t>connection</a:t>
+            </a:r>
+            <a:r>
+              <a:rPr lang="en-US"/>
+              <a:t> manages endpoint and authentication.</a:t>
+            </a:r>
+          </a:p>
+          <a:p>
+            <a:pPr marL="171450" indent="-171450">
+              <a:buFont typeface="Arial"/>
+              <a:buChar char="•"/>
+            </a:pPr>
+            <a:r>
+              <a:rPr lang="en-US"/>
+              <a:t>The </a:t>
+            </a:r>
+            <a:r>
+              <a:rPr lang="en-US" b="1"/>
+              <a:t>tool</a:t>
+            </a:r>
+            <a:r>
+              <a:rPr lang="en-US"/>
+              <a:t> defines the A2A integration contract.</a:t>
+            </a:r>
+          </a:p>
+          <a:p>
+            <a:pPr marL="171450" indent="-171450">
+              <a:buFont typeface="Arial"/>
+              <a:buChar char="•"/>
+            </a:pPr>
+            <a:r>
+              <a:rPr lang="en-US"/>
+              <a:t>The </a:t>
+            </a:r>
+            <a:r>
+              <a:rPr lang="en-US" b="1"/>
+              <a:t>agent version</a:t>
+            </a:r>
+            <a:r>
+              <a:rPr lang="en-US"/>
+              <a:t> determines which deployed agent can use it.</a:t>
+            </a:r>
+          </a:p>
+          <a:p>
+            <a:r>
+              <a:rPr lang="en-US"/>
+              <a:t>For new implementations, use the generally available a2a tool with protocol version 1.0. The earlier a2a_preview integration targets version 0.3 and remains relevant only for existing integrations.</a:t>
+            </a:r>
+          </a:p>
+          <a:p>
+            <a:endParaRPr lang="en-US" dirty="0"/>
           </a:p>
         </p:txBody>
       </p:sp>
@@ -676,28 +1307,226 @@
           <a:lstStyle/>
           <a:p>
             <a:r>
-              <a:t>Enabling inbound exposure is a single operation, but the defaults it establishes require attention.</a:t>
-            </a:r>
-          </a:p>
-          <a:p>
-            <a:r>
-              <a:t>The PATCH sets two structures. The agent_card supplies the description, version and the skills to be advertised. The agent_endpoint protocol_configuration must include responses alongside a2a, because inbound A2A is implemented over the responses protocol; an agent that does not support responses cannot be exposed this way.</a:t>
-            </a:r>
-          </a:p>
-          <a:p>
-            <a:r>
-              <a:t>The behaviour to communicate to consumers is version selection. Where a request does not state a protocol version, Foundry serves preview version 0.3, consistent with the specification's rule that an absent version header denotes 0.3. A client built against version 1.0 that omits the header therefore receives the earlier method names, content model and enumeration values without any explicit error. Consumers should either perform card-based discovery against the 1.0 card path or send the version header explicitly.</a:t>
-            </a:r>
-          </a:p>
-          <a:p>
-            <a:r>
-              <a:t>The Entra-only constraint is a design input for partner integration: the open protocol anticipates anonymous card retrieval, Foundry does not permit it, so a partner requires an identity in the tenant and a role assignment before they can retrieve the card.</a:t>
-            </a:r>
-          </a:p>
-          <a:p>
-            <a:r>
-              <a:t>Anticipated question: how long is task state retained? Sixty days from the most recent write, with each write resetting the period.</a:t>
-            </a:r>
+              <a:rPr lang="en-US"/>
+              <a:t>This slide shows how to expose a Foundry agent as an inbound A2A endpoint, allowing external agents to discover and invoke it.</a:t>
+            </a:r>
+          </a:p>
+          <a:p>
+            <a:r>
+              <a:rPr lang="en-US"/>
+              <a:t>The configuration is applied through a single </a:t>
+            </a:r>
+            <a:r>
+              <a:rPr lang="en-US" b="1"/>
+              <a:t>PATCH operation</a:t>
+            </a:r>
+            <a:r>
+              <a:rPr lang="en-US"/>
+              <a:t>. It adds two elements to the existing agent definition:</a:t>
+            </a:r>
+          </a:p>
+          <a:p>
+            <a:pPr marL="171450" indent="-171450">
+              <a:buFont typeface="Arial"/>
+              <a:buChar char="•"/>
+            </a:pPr>
+            <a:r>
+              <a:rPr lang="en-US"/>
+              <a:t>An </a:t>
+            </a:r>
+            <a:r>
+              <a:rPr lang="en-US" b="1"/>
+              <a:t>Agent Card</a:t>
+            </a:r>
+            <a:r>
+              <a:rPr lang="en-US"/>
+              <a:t>, describing the agent’s version and declared skills.</a:t>
+            </a:r>
+          </a:p>
+          <a:p>
+            <a:pPr marL="171450" indent="-171450">
+              <a:buFont typeface="Arial"/>
+              <a:buChar char="•"/>
+            </a:pPr>
+            <a:r>
+              <a:rPr lang="en-US"/>
+              <a:t>An </a:t>
+            </a:r>
+            <a:r>
+              <a:rPr lang="en-US" b="1"/>
+              <a:t>A2A protocol configuration</a:t>
+            </a:r>
+            <a:r>
+              <a:rPr lang="en-US"/>
+              <a:t>, enabling the inbound endpoint.</a:t>
+            </a:r>
+          </a:p>
+          <a:p>
+            <a:r>
+              <a:rPr lang="en-US"/>
+              <a:t>Once enabled, Foundry exposes two service paths:</a:t>
+            </a:r>
+          </a:p>
+          <a:p>
+            <a:pPr marL="171450" indent="-171450">
+              <a:buFont typeface="Arial"/>
+              <a:buChar char="•"/>
+            </a:pPr>
+            <a:r>
+              <a:rPr lang="en-US"/>
+              <a:t>The </a:t>
+            </a:r>
+            <a:r>
+              <a:rPr lang="en-US" b="1"/>
+              <a:t>Agent Card path</a:t>
+            </a:r>
+            <a:r>
+              <a:rPr lang="en-US"/>
+              <a:t> for machine-readable discovery.</a:t>
+            </a:r>
+          </a:p>
+          <a:p>
+            <a:pPr marL="171450" indent="-171450">
+              <a:buFont typeface="Arial"/>
+              <a:buChar char="•"/>
+            </a:pPr>
+            <a:r>
+              <a:rPr lang="en-US"/>
+              <a:t>The </a:t>
+            </a:r>
+            <a:r>
+              <a:rPr lang="en-US" b="1"/>
+              <a:t>task endpoint</a:t>
+            </a:r>
+            <a:r>
+              <a:rPr lang="en-US"/>
+              <a:t> where authenticated clients submit A2A requests.</a:t>
+            </a:r>
+          </a:p>
+          <a:p>
+            <a:r>
+              <a:rPr lang="en-US"/>
+              <a:t>Clients can select the protocol version through card discovery, a request header or a query parameter. If version signals conflict, Foundry rejects the request rather than choosing implicitly. </a:t>
+            </a:r>
+          </a:p>
+          <a:p>
+            <a:endParaRPr lang="en-US" dirty="0"/>
+          </a:p>
+          <a:p>
+            <a:r>
+              <a:rPr lang="en-US"/>
+              <a:t>Limitations:</a:t>
+            </a:r>
+            <a:endParaRPr lang="en-US" dirty="0"/>
+          </a:p>
+          <a:p>
+            <a:pPr marL="171450" indent="-171450">
+              <a:buFont typeface="Arial"/>
+              <a:buChar char="•"/>
+            </a:pPr>
+            <a:r>
+              <a:rPr lang="en-US"/>
+              <a:t>First, the agent must support the </a:t>
+            </a:r>
+            <a:r>
+              <a:rPr lang="en-US" b="1"/>
+              <a:t>Responses protocol</a:t>
+            </a:r>
+            <a:r>
+              <a:rPr lang="en-US"/>
+              <a:t>. Prompt agents support it by default, but other agent types should be verified before enabling A2A.</a:t>
+            </a:r>
+          </a:p>
+          <a:p>
+            <a:pPr marL="171450" indent="-171450">
+              <a:buFont typeface="Arial"/>
+              <a:buChar char="•"/>
+            </a:pPr>
+            <a:r>
+              <a:rPr lang="en-US"/>
+              <a:t>Second, configuration is currently available through the </a:t>
+            </a:r>
+            <a:r>
+              <a:rPr lang="en-US" b="1"/>
+              <a:t>REST API and Python SDK</a:t>
+            </a:r>
+            <a:r>
+              <a:rPr lang="en-US"/>
+              <a:t>, not through the Foundry portal.</a:t>
+            </a:r>
+          </a:p>
+          <a:p>
+            <a:pPr marL="171450" indent="-171450">
+              <a:buFont typeface="Arial"/>
+              <a:buChar char="•"/>
+            </a:pPr>
+            <a:r>
+              <a:rPr lang="en-US"/>
+              <a:t>Third, both Agent Card retrieval and task submission require </a:t>
+            </a:r>
+            <a:r>
+              <a:rPr lang="en-US" b="1"/>
+              <a:t>Microsoft Entra ID authentication</a:t>
+            </a:r>
+            <a:r>
+              <a:rPr lang="en-US"/>
+              <a:t>. Anonymous access and key-based authentication are not supported.</a:t>
+            </a:r>
+          </a:p>
+          <a:p>
+            <a:pPr marL="171450" indent="-171450">
+              <a:buFont typeface="Arial"/>
+              <a:buChar char="•"/>
+            </a:pPr>
+            <a:r>
+              <a:rPr lang="en-US"/>
+              <a:t>Finally, authentication alone is insufficient. The calling user or service principal also requires the </a:t>
+            </a:r>
+            <a:r>
+              <a:rPr lang="en-US" b="1"/>
+              <a:t>Foundry Agent Consumer</a:t>
+            </a:r>
+            <a:r>
+              <a:rPr lang="en-US"/>
+              <a:t> role at the agent or project scope.</a:t>
+            </a:r>
+          </a:p>
+          <a:p>
+            <a:r>
+              <a:rPr lang="en-US" dirty="0"/>
+              <a:t>This means an agent hosted outside Azure can still invoke the Foundry agent, but the calling workload must obtain an Entra token through an </a:t>
+            </a:r>
+            <a:r>
+              <a:rPr lang="en-US" dirty="0" err="1"/>
+              <a:t>authorised</a:t>
+            </a:r>
+            <a:r>
+              <a:rPr lang="en-US" dirty="0"/>
+              <a:t> user or service identity.</a:t>
+            </a:r>
+          </a:p>
+          <a:p>
+            <a:r>
+              <a:rPr lang="en-US" dirty="0"/>
+              <a:t>The key takeaway is that Foundry turns an existing Responses-based agent into a discoverable A2A service, while keeping discovery and task execution behind the same identity and </a:t>
+            </a:r>
+            <a:r>
+              <a:rPr lang="en-US" dirty="0" err="1"/>
+              <a:t>authorisation</a:t>
+            </a:r>
+            <a:r>
+              <a:rPr lang="en-US" dirty="0"/>
+              <a:t> boundary.</a:t>
+            </a:r>
+          </a:p>
+          <a:p>
+            <a:r>
+              <a:rPr lang="en-US"/>
+              <a:t>Because inbound A2A remains in preview, protocol coverage, regional availability and production support commitments should be validated before adoption.</a:t>
+            </a:r>
+          </a:p>
+          <a:p>
+            <a:endParaRPr lang="en-US" dirty="0"/>
           </a:p>
         </p:txBody>
       </p:sp>
@@ -766,33 +1595,116 @@
           <a:lstStyle/>
           <a:p>
             <a:r>
-              <a:t>One of the five outbound methods preserves the identity of the end user, and that single property determines most A2A authorisation designs.</a:t>
-            </a:r>
-          </a:p>
-          <a:p>
-            <a:r>
-              <a:t>The underlying protocol principle is that A2A payloads carry no identity. Identity is established at the transport layer using schemes declared in the Agent Card, which is why the card must be retrieved before the first authenticated call.</a:t>
-            </a:r>
-          </a:p>
-          <a:p>
-            <a:r>
-              <a:t>For outbound integration the selection rule is straightforward. Where the remote agent needs only to establish that a trusted system is calling, the agent identity or project managed identity is sufficient. Where it must enforce what a specific user is permitted to access, OAuth identity passthrough is required, and the calling user needs the Foundry Agent Consumer role. Note also that before an agent is published all agents within a project share a common identity; after publication each receives a distinct one.</a:t>
-            </a:r>
-          </a:p>
-          <a:p>
-            <a:r>
-              <a:t>Inbound is more restrictive than the open protocol: Entra ID only, no key-based authentication, and no anonymous card retrieval.</a:t>
-            </a:r>
-          </a:p>
-          <a:p>
-            <a:r>
-              <a:t>The unresolved item is network placement, where the isolation matrix and the troubleshooting guidance are not consistent.</a:t>
-            </a:r>
-          </a:p>
-          <a:p>
-            <a:r>
-              <a:t>Anticipated question: can a remote agent sit behind a private endpoint? Verify against your own topology; the documentation is currently ambiguous.</a:t>
-            </a:r>
+              <a:rPr lang="en-US"/>
+              <a:t>For </a:t>
+            </a:r>
+            <a:r>
+              <a:rPr lang="en-US" b="1"/>
+              <a:t>outbound calls</a:t>
+            </a:r>
+            <a:r>
+              <a:rPr lang="en-US"/>
+              <a:t>, where Foundry invokes a remote agent, the authentication method is defined in the RemoteA2A connection.</a:t>
+            </a:r>
+          </a:p>
+          <a:p>
+            <a:r>
+              <a:rPr lang="en-US"/>
+              <a:t>Foundry can present:</a:t>
+            </a:r>
+          </a:p>
+          <a:p>
+            <a:pPr marL="171450" indent="-171450">
+              <a:buFont typeface="Arial"/>
+              <a:buChar char="•"/>
+            </a:pPr>
+            <a:r>
+              <a:rPr lang="en-US"/>
+              <a:t>An API key or other key-based credential.</a:t>
+            </a:r>
+          </a:p>
+          <a:p>
+            <a:pPr marL="171450" indent="-171450">
+              <a:buFont typeface="Arial"/>
+              <a:buChar char="•"/>
+            </a:pPr>
+            <a:r>
+              <a:rPr lang="en-US"/>
+              <a:t>The Foundry agent’s managed identity.</a:t>
+            </a:r>
+          </a:p>
+          <a:p>
+            <a:pPr marL="171450" indent="-171450">
+              <a:buFont typeface="Arial"/>
+              <a:buChar char="•"/>
+            </a:pPr>
+            <a:r>
+              <a:rPr lang="en-US"/>
+              <a:t>The project-managed identity.</a:t>
+            </a:r>
+          </a:p>
+          <a:p>
+            <a:pPr marL="171450" indent="-171450">
+              <a:buFont typeface="Arial"/>
+              <a:buChar char="•"/>
+            </a:pPr>
+            <a:r>
+              <a:rPr lang="en-US"/>
+              <a:t>The calling user’s OAuth token through identity passthrough.</a:t>
+            </a:r>
+          </a:p>
+          <a:p>
+            <a:pPr marL="171450" indent="-171450">
+              <a:buFont typeface="Arial"/>
+              <a:buChar char="•"/>
+            </a:pPr>
+            <a:r>
+              <a:rPr lang="en-US"/>
+              <a:t>No credential, if the remote endpoint permits anonymous access.</a:t>
+            </a:r>
+          </a:p>
+          <a:p>
+            <a:r>
+              <a:rPr lang="en-US"/>
+              <a:t>The first three service-oriented patterns identify the application or agent, but do not preserve the end-user identity. OAuth passthrough is the option that retains the calling user’s context.</a:t>
+            </a:r>
+          </a:p>
+          <a:p>
+            <a:r>
+              <a:rPr lang="en-US"/>
+              <a:t>Agent Card discovery is anonymous by default for outbound connections. If the remote Agent Card is protected, Foundry can be configured to send the connection credential when retrieving it.</a:t>
+            </a:r>
+          </a:p>
+          <a:p>
+            <a:r>
+              <a:rPr lang="en-US"/>
+              <a:t>For </a:t>
+            </a:r>
+            <a:r>
+              <a:rPr lang="en-US" b="1"/>
+              <a:t>inbound calls</a:t>
+            </a:r>
+            <a:r>
+              <a:rPr lang="en-US"/>
+              <a:t>, where an external agent invokes a Foundry agent, the model is stricter. Both Agent Card retrieval and task submission require a Microsoft Entra token. The calling user or service identity must also have the </a:t>
+            </a:r>
+            <a:r>
+              <a:rPr lang="en-US" b="1"/>
+              <a:t>Foundry Agent Consumer</a:t>
+            </a:r>
+            <a:r>
+              <a:rPr lang="en-US"/>
+              <a:t> role at project or individual-agent scope.</a:t>
+            </a:r>
+          </a:p>
+          <a:p>
+            <a:r>
+              <a:rPr lang="en-US"/>
+              <a:t>This means that an agent hosted on another platform can call Foundry, but its workload must first obtain an Entra token, either as a service identity or on behalf of a user.</a:t>
+            </a:r>
+          </a:p>
+          <a:p>
+            <a:endParaRPr lang="en-US" dirty="0"/>
           </a:p>
         </p:txBody>
       </p:sp>
@@ -861,28 +1773,21 @@
           <a:lstStyle/>
           <a:p>
             <a:r>
-              <a:t>The three protocol constraints at the top of the left column exclude a class of designs and should be checked before any commitment is made.</a:t>
-            </a:r>
-          </a:p>
-          <a:p>
-            <a:r>
-              <a:t>Text-only is the most restrictive. A scenario requiring a document to be transmitted to a remote agent for field extraction cannot be implemented directly; a reference is passed instead, and the remote agent retrieves the content itself. The absence of Server-Sent Events means no intermediate progress is available from a remote agent, which constrains what can be presented to a user during execution.</a:t>
-            </a:r>
-          </a:p>
-          <a:p>
-            <a:r>
-              <a:t>Sixty-day retention is generous but finite and resets on each write. Where an audit record must be retained longer, task identifiers and outcomes should be copied into an application-owned store as tasks complete.</a:t>
-            </a:r>
-          </a:p>
-          <a:p>
-            <a:r>
-              <a:t>On instrumentation: the specification's own enterprise guidance directs implementers toward OpenTelemetry and W3C Trace Context, logging task identifier, session identifier and correlation identifiers, and auditing task creation and critical state transitions. Agent card version should be added to that set, since the counterpart can change its declared surface without notification.</a:t>
-            </a:r>
-          </a:p>
-          <a:p>
-            <a:r>
-              <a:t>Anticipated question: what is the per-request timeout? It is not documented. Measure it in the target environment before designing around a value.</a:t>
-            </a:r>
+              <a:rPr lang="en-US"/>
+              <a:t>This slide lists the documented service limits that constrain A2A designs in Foundry, and the signals that show the integration is working correctly.
+The core idea is that three protocol constraints exclude a whole class of designs and should be checked before any commitment is made.
+First, text only.
+This is the most restrictive constraint. File and structured data parts are not carried, so a scenario that sends a document to a remote agent for field extraction cannot be implemented directly. A reference is passed instead, and the remote agent retrieves the content itself.
+Second, no streaming.
+Server-Sent Events are not supported for A2A targets, so no intermediate progress is available from the remote agent, which limits what can be shown to a user during execution.
+Third, JSON-RPC only at version 1.0.
+Version 0.3 also allowed HTTP+JSON.
+The remaining limits are operational. Tasks and contexts are retained for sixty days from the most recent write; where an audit record must last longer, task identifiers and outcomes should be copied into an application-owned store as tasks complete. No numeric request timeout is documented, so it should be measured in the target environment rather than assumed; retry with exponential backoff is the stated guidance.
+On instrumentation, the specification's enterprise guidance points to OpenTelemetry and W3C Trace Context: log task, session and correlation identifiers, and audit task creation and critical state transitions. The slide adds four signals: the distribution of terminal states, where a rising share of rejected tasks indicates a contract defect rather than a capacity problem; interrupted tasks that never resume, which are silent failures in most implementations; the agent card version, since the counterpart can change its declared surface without notice; and latency and retry rate.
+Azure API Management can also publish an A2A agent API from its agent card, mediate JSON-RPC to the backend, and emit the agent identifier and name as OpenTelemetry attributes. The same component underlies custom agent registration in the Foundry control plane.
+The key takeaway is that the remote agent is an external dependency and must be monitored as one, with its own error budget.</a:t>
+            </a:r>
+            <a:endParaRPr/>
           </a:p>
         </p:txBody>
       </p:sp>
@@ -951,28 +1856,19 @@
           <a:lstStyle/>
           <a:p>
             <a:r>
-              <a:t>The selection criterion is the nature of the counterpart. Where it is a function with a fixed schema, the Model Context Protocol applies. Where it is an autonomous agent, A2A applies.</a:t>
-            </a:r>
-          </a:p>
-          <a:p>
-            <a:r>
-              <a:t>The row on expressive range carries the substantive difference. A tool invocation states an operation and its arguments. An A2A task states an objective, and the protocol accepts the response that further input is required before the objective can be met, without treating that as a failure. This capability is discarded when an agent is exposed through a tool interface, and it is the principal reason the specification exists.</a:t>
-            </a:r>
-          </a:p>
-          <a:p>
-            <a:r>
-              <a:t>The ownership row is the practical discriminator in architecture review. Where the counterpart is maintained by a party that changes it independently, a declared capability manifest, a versioned contract and a common task model have measurable value. Within a single codebase, they add a network hop and a protocol to something a direct invocation already performs.</a:t>
-            </a:r>
-          </a:p>
-          <a:p>
-            <a:r>
-              <a:t>Both specifications have been hosted by the Agentic AI Foundation since 27 August 2026, which settles any question of competing direction.</a:t>
-            </a:r>
-          </a:p>
-          <a:p>
-            <a:r>
-              <a:t>Anticipated question: can an A2A agent be exposed as a Model Context Protocol tool? For stateless, well-defined skills, yes; the task lifecycle is not preserved.</a:t>
-            </a:r>
+              <a:rPr lang="en-US"/>
+              <a:t>This slide compares A2A and the Model Context Protocol by applying the same criteria to both.
+The core idea is that the selection criterion is the nature of the counterpart. When it is a function with a fixed schema, the Model Context Protocol applies. When it is an autonomous agent that reasons and plans, A2A applies.
+Two rows carry the substantive difference.
+First, expressive range.
+A tool invocation states an operation and its arguments. An A2A task states an objective, and the protocol accepts the answer that more input is required before the objective can be met, without treating it as a failure. This capability is lost when an agent is exposed through a tool interface, and it is the main reason the specification exists. The failure modes follow from it: the Model Context Protocol is designed for invalid arguments and unavailable dependencies, A2A for rejected tasks, suspension pending input and long execution.
+Second, ownership.
+This is the practical discriminator in an architecture review. When the counterpart is maintained by a party that changes it independently, a declared capability manifest, a versioned contract and a common task model have measurable value. Within a single codebase, they add a network hop and a protocol to something a direct call already does.
+The other rows follow the same logic: the Model Context Protocol extends one agent's capability within its own trust boundary, while A2A extends the set of agents a system can coordinate across a boundary the caller does not control.
+Both specifications have been hosted by the Agentic AI Foundation since 27 August 2026, which settles any question of competing direction. A common question is whether an A2A agent can be exposed as a Model Context Protocol tool. It can, for stateless, well-defined skills, but the task lifecycle is not preserved.
+The key takeaway is that the two protocols compose: the Model Context Protocol operates within an agent, A2A operates between agents, and one agent is commonly a client of the first and a client or server of the second.</a:t>
+            </a:r>
+            <a:endParaRPr/>
           </a:p>
         </p:txBody>
       </p:sp>
@@ -1041,28 +1937,20 @@
           <a:lstStyle/>
           <a:p>
             <a:r>
-              <a:t>The A2A tool is appropriate where a calling agent delegates a discrete objective and retains control of the interaction. Where a defined multi-step process is required — branching, approval, compensation across several agents — that is orchestration, and belongs in a workflow rather than a tool invocation.</a:t>
-            </a:r>
-          </a:p>
-          <a:p>
-            <a:r>
-              <a:t>The published guidance is explicit. For lightweight delegation without a formal process, an agent is exposed for inbound A2A and called directly. For orchestration logic maintained on a code-first runtime, Microsoft Agent Framework is identified as the closest equivalent to the retiring workflow designer. For a visual low-code designer, Azure Logic Apps.</a:t>
-            </a:r>
-          </a:p>
-          <a:p>
-            <a:r>
-              <a:t>These mechanisms are not mutually exclusive. Within Microsoft Agent Framework a remote A2A agent is represented as an agent object in application code and participates in sequential, concurrent, hand-off and group-chat workflows. The common composition is therefore a workflow that orchestrates, with one or more participants reached over A2A.</a:t>
-            </a:r>
-          </a:p>
-          <a:p>
-            <a:r>
-              <a:t>The withdrawal of Connected Agents should be raised early with any team currently building on the classic API.</a:t>
-            </a:r>
-          </a:p>
-          <a:p>
-            <a:r>
-              <a:t>Anticipated question: is Microsoft Agent Framework generally available? The .NET A2A packages remain prerelease even though the protocol itself is stable; verify package status before committing to a delivery date.</a:t>
-            </a:r>
+              <a:rPr lang="en-US"/>
+              <a:t>This slide compares the three supported mechanisms for agent-to-agent interaction in Microsoft Foundry, and notes one that has been withdrawn.
+The core idea is that delegation and orchestration are different problems. When a calling agent hands over a discrete objective and keeps control of the interaction, that is delegation, and the A2A tool fits. When a defined multi-step process is needed, with branching, approval or compensation across several agents, that is orchestration, and it belongs in a workflow.
+First, the A2A tool.
+It is generally available. Orchestration stays with the calling agent, coupling is loose, an endpoint and a capability manifest, and it can reach any A2A-compliant agent, including another Foundry agent exposed for inbound A2A. As per official documentation, this is the route for lightweight delegation without a formal process.
+Second, Microsoft Agent Framework.
+It provides code-first orchestration for sequential, concurrent, hand-off and group-chat processes. A remote A2A agent is represented as an agent object in application code and participates as a full member of a workflow. The official guidance identifies it as the closest equivalent to the retiring workflow designer. Its .NET A2A packages are still prerelease even though the protocol itself is stable, so package status should be checked before committing to a delivery date.
+Third, Azure Logic Apps.
+It is the low-code option for business-process automation with a visual designer. Orchestration is held in the Logic App, outside the agent, and reach is defined by the available connectors.
+These mechanisms are not mutually exclusive. The common composition is a workflow that orchestrates, with one or more participants reached over A2A.
+Two changes need to be raised early with any team building on the classic API. The Connected Agents tool from the classic Agents API is not present in the new Foundry Agent Service; the documented replacements are the A2A tool and workflows. And visual workflows are scheduled for retirement on 1 December 2026, with new development directed to Microsoft Agent Framework.
+The key takeaway is to use the A2A tool for delegation and a workflow for orchestration, and to combine them when a process includes remote agents.</a:t>
+            </a:r>
+            <a:endParaRPr/>
           </a:p>
         </p:txBody>
       </p:sp>
@@ -1131,28 +2019,20 @@
           <a:lstStyle/>
           <a:p>
             <a:r>
-              <a:t>A2A justifies its additional complexity where the counterpart is not under the caller's control. Within a single codebase the cost generally exceeds the benefit.</a:t>
-            </a:r>
-          </a:p>
-          <a:p>
-            <a:r>
-              <a:t>The strongest indicator is organisational rather than technical. Where the counterpart is maintained by a party that alters its behaviour without consultation, a declared capability manifest, a versioned contract and an observable task model have direct operational value. Where it is a module in the same repository, A2A introduces a network boundary and a protocol in place of a direct invocation.</a:t>
-            </a:r>
-          </a:p>
-          <a:p>
-            <a:r>
-              <a:t>The two lower entries in the right-hand column are constraints of the Microsoft Foundry implementation rather than of the specification. The open protocol carries file and structured data parts and supports streaming. Where a scenario requires those capabilities today, the accurate statement is that the Foundry implementation does not yet carry them, not that A2A cannot.</a:t>
-            </a:r>
-          </a:p>
-          <a:p>
-            <a:r>
-              <a:t>The selection test at the base of the slide is the formulation to use in design sessions, as it separates the cases reliably without requiring familiarity with the specification.</a:t>
-            </a:r>
-          </a:p>
-          <a:p>
-            <a:r>
-              <a:t>Anticipated question: should an agent be exposed externally at the outset? Rarely. Outbound consumption is generally available while inbound exposure is preview and creates a versioned public contract.</a:t>
-            </a:r>
+              <a:rPr lang="en-US"/>
+              <a:t>This slide sets out when A2A is the appropriate mechanism and when it is not.
+The core idea is that A2A justifies its extra complexity where the counterpart is not under the caller's control. Within a single codebase, the cost usually exceeds the benefit.
+First, where A2A fits.
+The strongest indicator is organisational rather than technical: the counterpart is operated by another team, business unit or organisation, and changes independently of the caller's release cycle. In that case a declared capability manifest, a versioned contract and an observable task model have direct operational value. A2A also fits objective-level delegation, where the remote agent may need clarification before proceeding; a preference for one discovery mechanism and task model over a bespoke contract per counterpart; and capability publication, where other parties should be able to discover and call the agent without a proprietary client library.
+Second, where A2A does not fit.
+A fixed-schema operation with defined inputs and outputs and no retained state is a tool, and the Model Context Protocol applies with a simpler failure model. A defined multi-step process with branching, approval or compensation belongs in a workflow, where the control flow is explicit.
+The two lower entries in this column, non-text payloads and progress reporting, are constraints of the Microsoft Foundry implementation rather than of the specification. The open protocol carries file and structured data parts and supports streaming. Where a scenario needs those today, the accurate statement is that the Foundry implementation does not yet carry them, not that A2A cannot.
+Third, the selection test.
+The formulation at the bottom of the slide is the one to use in design sessions, because it separates the cases reliably without requiring familiarity with the specification: where the counterpart can be called with a fixed schema and needs no interaction until completion, it is a tool, not an agent.
+On exposure, an agent should rarely be published externally at the outset. Outbound consumption is generally available, while inbound exposure is preview and creates a versioned public contract.
+The key takeaway is that A2A is the right choice for objective-level delegation across ownership boundaries, and the wrong one for fixed-schema calls inside one.</a:t>
+            </a:r>
+            <a:endParaRPr/>
           </a:p>
         </p:txBody>
       </p:sp>
@@ -1221,38 +2101,97 @@
           <a:lstStyle/>
           <a:p>
             <a:r>
-              <a:t>The ordering is the substance of this slide. Each phase exists because omitting it produces a specific and predictable failure later.</a:t>
-            </a:r>
-          </a:p>
-          <a:p>
-            <a:r>
-              <a:t>Phase one is deliberately minimal: one tool, one endpoint under known ownership, one completed task. It validates connectivity, card resolution and credential handling together.</a:t>
-            </a:r>
-          </a:p>
-          <a:p>
-            <a:r>
-              <a:t>Phase two is where pilot implementations most often fail. A demonstration is built against an unauthenticated or key-based endpoint, and it emerges at security review that the remote agent must enforce per-user authorisation, for which OAuth identity passthrough is the only adequate mechanism. Validating that path early costs approximately one day; establishing it late requires rework of the integration.</a:t>
-            </a:r>
-          </a:p>
-          <a:p>
-            <a:r>
-              <a:t>Phase three precedes phase four because observability cannot be retrofitted into a distributed task graph once several agents are in place.</a:t>
-            </a:r>
-          </a:p>
-          <a:p>
-            <a:r>
-              <a:t>Phase five is last deliberately. Inbound exposure is preview, it establishes a versioned public contract with the associated maintenance obligation, and each consumer requires an identity in the tenant and a role assignment.</a:t>
-            </a:r>
-          </a:p>
-          <a:p>
-            <a:r>
-              <a:t>The advisory at the base is the supply-chain consideration and belongs in any governance discussion.</a:t>
-            </a:r>
-          </a:p>
-          <a:p>
-            <a:r>
-              <a:t>Anticipated question: what is a realistic duration for phase one? Approximately one day where role assignments already exist; the role assignments are typically the longer lead time.</a:t>
-            </a:r>
+              <a:rPr lang="en-US" b="1"/>
+              <a:t>First, establish connectivity.</a:t>
+            </a:r>
+            <a:br>
+              <a:rPr lang="en-US" b="1" dirty="0">
+                <a:cs typeface="+mn-lt"/>
+              </a:rPr>
+            </a:br>
+            <a:r>
+              <a:rPr lang="en-US" b="1" dirty="0"/>
+              <a:t> </a:t>
+            </a:r>
+            <a:r>
+              <a:rPr lang="en-US"/>
+              <a:t>Start with one remote A2A agent and one well-defined task. Configure the generally available A2A tool and confirm endpoint resolution, Agent Card retrieval, authentication and successful task completion.</a:t>
+            </a:r>
+          </a:p>
+          <a:p>
+            <a:r>
+              <a:rPr lang="en-US" b="1"/>
+              <a:t>Second, determine the identity model.</a:t>
+            </a:r>
+            <a:br>
+              <a:rPr lang="en-US" b="1" dirty="0">
+                <a:cs typeface="+mn-lt"/>
+              </a:rPr>
+            </a:br>
+            <a:r>
+              <a:rPr lang="en-US"/>
+              <a:t> Decide whether Foundry calls the remote agent using an API key, agent identity, project-managed identity or user identity passthrough. This choice should be deliberate because service identities identify the workload, while identity passthrough preserves end-user context.</a:t>
+            </a:r>
+          </a:p>
+          <a:p>
+            <a:r>
+              <a:rPr lang="en-US" b="1" dirty="0"/>
+              <a:t>Third, establish observability.</a:t>
+            </a:r>
+            <a:br>
+              <a:rPr lang="en-US" b="1" dirty="0">
+                <a:cs typeface="+mn-lt"/>
+              </a:rPr>
+            </a:br>
+            <a:r>
+              <a:rPr lang="en-US" dirty="0"/>
+              <a:t> Capture task and context identifiers, terminal status, latency and failure information. Alert on repeated errors or unresolved tasks, and monitor the remote Agent Card version for changes that could affect compatibility.</a:t>
+            </a:r>
+          </a:p>
+          <a:p>
+            <a:r>
+              <a:rPr lang="en-US" b="1"/>
+              <a:t>Fourth, decide the orchestration topology.</a:t>
+            </a:r>
+            <a:br>
+              <a:rPr lang="en-US" b="1" dirty="0">
+                <a:cs typeface="+mn-lt"/>
+              </a:rPr>
+            </a:br>
+            <a:r>
+              <a:rPr lang="en-US"/>
+              <a:t> Use direct delegation when one agent can complete the task independently. Introduce a workflow only when the solution requires branching, approvals, multiple agents or explicit state coordination. A2A defines communication between agents, but it does not define the overall orchestration model.</a:t>
+            </a:r>
+          </a:p>
+          <a:p>
+            <a:r>
+              <a:rPr lang="en-US" b="1"/>
+              <a:t>Fifth, consider inbound exposure.</a:t>
+            </a:r>
+            <a:br>
+              <a:rPr lang="en-US" b="1" dirty="0">
+                <a:cs typeface="+mn-lt"/>
+              </a:rPr>
+            </a:br>
+            <a:r>
+              <a:rPr lang="en-US"/>
+              <a:t> Only expose the Foundry agent as an A2A server when external agents genuinely need to invoke it. This capability is currently in preview, creates a versioned public contract and requires external callers to have a Microsoft Entra identity and the appropriate role assignment.</a:t>
+            </a:r>
+          </a:p>
+          <a:p>
+            <a:r>
+              <a:rPr lang="en-US"/>
+              <a:t>Before starting, validate four prerequisites: the required Foundry roles, a supported SDK, a trusted remote endpoint with a valid certificate and retrievable Agent Card, and a clear authentication decision.</a:t>
+            </a:r>
+          </a:p>
+          <a:p>
+            <a:r>
+              <a:rPr lang="en-US"/>
+              <a:t>The key recommendation is to begin with the smallest controlled integration, prove connectivity and identity, add operational visibility, and only then expand into multi-agent orchestration or inbound exposure.</a:t>
+            </a:r>
+          </a:p>
+          <a:p>
+            <a:endParaRPr lang="en-US" dirty="0"/>
           </a:p>
         </p:txBody>
       </p:sp>
@@ -1321,27 +2260,182 @@
           <a:lstStyle/>
           <a:p>
             <a:r>
-              <a:t>The sequence is specification-first by design. A2A is an open standard with a defined object model, operation set and lifecycle. Those elements are invariant across implementations, and configuring the Microsoft Foundry surface without understanding them produces integrations that fail at the protocol boundary rather than at the service boundary.</a:t>
-            </a:r>
-          </a:p>
-          <a:p>
-            <a:r>
-              <a:t>Sections one and two are vendor-neutral and apply regardless of where the remote agent executes. Section three introduces the Microsoft Foundry implementation and distinguishes the two supported directions. Section four covers the material that determines whether a design passes a security and operations review: authentication methods, identity propagation, documented service constraints and telemetry.</a:t>
-            </a:r>
-          </a:p>
-          <a:p>
-            <a:r>
-              <a:t>Section five is the selection material. It contains the protocol comparison against the Model Context Protocol, the choice between A2A and the alternative orchestration mechanisms available in Foundry, and explicit applicability criteria. Section six covers phased adoption and current release status.</a:t>
-            </a:r>
-          </a:p>
-          <a:p>
-            <a:r>
-              <a:t>Where time is constrained, slides 8, 11 and 14 carry the highest density: the operation set, the implementation architecture and the authentication model respectively.</a:t>
-            </a:r>
-          </a:p>
-          <a:p>
-            <a:r>
-              <a:t>Anticipated question: are reference implementations available? Yes. Slide 21 identifies the canonical repositories.</a:t>
+              <a:rPr lang="en-US" dirty="0"/>
+              <a:t>Today we will look at A2A from the specification down to the Microsoft Foundry implementation, and then at when to use it.
+The sequence is specification-first by design. </a:t>
+            </a:r>
+            <a:endParaRPr lang="en-US"/>
+          </a:p>
+          <a:p>
+            <a:endParaRPr lang="en-US" dirty="0"/>
+          </a:p>
+          <a:p>
+            <a:r>
+              <a:rPr lang="en-US"/>
+              <a:t>A2A is an </a:t>
+            </a:r>
+            <a:r>
+              <a:rPr lang="en-US" b="1" dirty="0"/>
+              <a:t>open standard with a defined object model, operation set and task lifecycle.</a:t>
+            </a:r>
+            <a:r>
+              <a:rPr lang="en-US" dirty="0"/>
+              <a:t> </a:t>
+            </a:r>
+            <a:endParaRPr lang="en-US"/>
+          </a:p>
+          <a:p>
+            <a:pPr marL="171450" indent="-171450">
+              <a:buFont typeface="Arial"/>
+              <a:buChar char="•"/>
+            </a:pPr>
+            <a:r>
+              <a:rPr lang="en-US"/>
+              <a:t>We begin with the </a:t>
+            </a:r>
+            <a:r>
+              <a:rPr lang="en-US" b="1"/>
+              <a:t>protocol foundations</a:t>
+            </a:r>
+            <a:r>
+              <a:rPr lang="en-US"/>
+              <a:t>: </a:t>
+            </a:r>
+            <a:r>
+              <a:rPr lang="en-US" i="1"/>
+              <a:t>the formal definition, the design principles, the declared scope and the integration problem the specification addresses</a:t>
+            </a:r>
+            <a:r>
+              <a:rPr lang="en-US"/>
+              <a:t>.</a:t>
+            </a:r>
+          </a:p>
+          <a:p>
+            <a:pPr marL="171450" indent="-171450">
+              <a:buFont typeface="Arial"/>
+              <a:buChar char="•"/>
+            </a:pPr>
+            <a:r>
+              <a:rPr lang="en-US"/>
+              <a:t>We then examine the </a:t>
+            </a:r>
+            <a:r>
+              <a:rPr lang="en-US" b="1"/>
+              <a:t>protocol mechanics</a:t>
+            </a:r>
+            <a:r>
+              <a:rPr lang="en-US"/>
+              <a:t>: </a:t>
+            </a:r>
+            <a:r>
+              <a:rPr lang="en-US" i="1"/>
+              <a:t>the data model, the Agent Card, the operation set and transport bindings, the task state model and the interaction modes.</a:t>
+            </a:r>
+            <a:r>
+              <a:rPr lang="en-US" dirty="0"/>
+              <a:t> </a:t>
+            </a:r>
+            <a:endParaRPr lang="en-US"/>
+          </a:p>
+          <a:p>
+            <a:pPr marL="171450" indent="-171450">
+              <a:buFont typeface="Arial"/>
+              <a:buChar char="•"/>
+            </a:pPr>
+            <a:r>
+              <a:rPr lang="en-US"/>
+              <a:t>The third section introduces the </a:t>
+            </a:r>
+            <a:r>
+              <a:rPr lang="en-US" b="1"/>
+              <a:t>Microsoft Foundry implementation</a:t>
+            </a:r>
+            <a:r>
+              <a:rPr lang="en-US"/>
+              <a:t> and separates the</a:t>
+            </a:r>
+            <a:r>
+              <a:rPr lang="en-US" b="1"/>
+              <a:t> two supported directions</a:t>
+            </a:r>
+            <a:r>
+              <a:rPr lang="en-US"/>
+              <a:t>: </a:t>
+            </a:r>
+            <a:r>
+              <a:rPr lang="en-US" b="1"/>
+              <a:t>outbound consumption</a:t>
+            </a:r>
+            <a:r>
+              <a:rPr lang="en-US"/>
+              <a:t> of a r</a:t>
+            </a:r>
+            <a:r>
+              <a:rPr lang="en-US" b="1"/>
+              <a:t>emote agent and inbound exposure of a Foundry agent</a:t>
+            </a:r>
+            <a:r>
+              <a:rPr lang="en-US"/>
+              <a:t>.</a:t>
+            </a:r>
+          </a:p>
+          <a:p>
+            <a:pPr marL="171450" indent="-171450">
+              <a:buFont typeface="Arial"/>
+              <a:buChar char="•"/>
+            </a:pPr>
+            <a:r>
+              <a:rPr lang="en-US"/>
+              <a:t>The fourth section covers </a:t>
+            </a:r>
+            <a:r>
+              <a:rPr lang="en-US" b="1"/>
+              <a:t> security and operations review</a:t>
+            </a:r>
+            <a:r>
+              <a:rPr lang="en-US"/>
+              <a:t>: </a:t>
+            </a:r>
+            <a:r>
+              <a:rPr lang="en-US" i="1"/>
+              <a:t>authentication methods, identity propagation, documented service constraints and telemetry</a:t>
+            </a:r>
+            <a:r>
+              <a:rPr lang="en-US"/>
+              <a:t>.</a:t>
+            </a:r>
+          </a:p>
+          <a:p>
+            <a:pPr marL="171450" indent="-171450">
+              <a:buFont typeface="Arial"/>
+              <a:buChar char="•"/>
+            </a:pPr>
+            <a:r>
+              <a:rPr lang="en-US"/>
+              <a:t>The fifth section is the selection material: the </a:t>
+            </a:r>
+            <a:r>
+              <a:rPr lang="en-US" i="1"/>
+              <a:t>comparison with the Model Context Protocol, the choice between A2A and the other orchestration mechanisms in Foundry</a:t>
+            </a:r>
+            <a:r>
+              <a:rPr lang="en-US"/>
+              <a:t>, and explicit applicability criteria.</a:t>
+            </a:r>
+          </a:p>
+          <a:p>
+            <a:pPr marL="171450" indent="-171450">
+              <a:buFont typeface="Arial"/>
+              <a:buChar char="•"/>
+            </a:pPr>
+            <a:r>
+              <a:rPr lang="en-US"/>
+              <a:t>We close with a phased adoption sequence, current release status, version compatibility and the reference repositories, which are listed on slide 21.</a:t>
+            </a:r>
+            <a:r>
+              <a:rPr lang="en-US" dirty="0"/>
+              <a:t>
+</a:t>
             </a:r>
           </a:p>
         </p:txBody>
@@ -1411,33 +2505,19 @@
           <a:lstStyle/>
           <a:p>
             <a:r>
-              <a:t>Most A2A material available publicly predates version 1.0, and the changes listed on the left are sufficient to cause failure rather than a compatibility warning.</a:t>
-            </a:r>
-          </a:p>
-          <a:p>
-            <a:r>
-              <a:t>On the specification: the published version is 1.0.1, but only the major and minor components participate in negotiation, so clients state 1.0. Patch releases are corrections and do not affect compatibility.</a:t>
-            </a:r>
-          </a:p>
-          <a:p>
-            <a:r>
-              <a:t>The governance position is worth stating to any customer who identifies A2A as a Google project. It has not been one since June 2025, when it transferred to the Linux Foundation, and since August 2026 it has been a Growth Stage project at the Agentic AI Foundation, which also hosts the Model Context Protocol. Microsoft holds one of eight technical steering committee seats.</a:t>
-            </a:r>
-          </a:p>
-          <a:p>
-            <a:r>
-              <a:t>On the Foundry side the distinction to communicate precisely is that outbound consumption is generally available while inbound exposure is preview, and that the earlier preview tool type remains available for existing integrations.</a:t>
-            </a:r>
-          </a:p>
-          <a:p>
-            <a:r>
-              <a:t>The verification note in the lower right describes a genuine inconsistency between samples and documentation that will affect a developer who begins from a repository.</a:t>
-            </a:r>
-          </a:p>
-          <a:p>
-            <a:r>
-              <a:t>Anticipated question: should development target 1.0 or 0.3? Version 1.0, with the version header stated explicitly on every request.</a:t>
-            </a:r>
+              <a:rPr lang="en-US"/>
+              <a:t>This slide summarises the current specification and implementation status, and the changes in version 1.0 that invalidate earlier client code.
+The core idea is that most public A2A material predates version 1.0, and the changes listed here cause failures rather than compatibility warnings.
+First, the specification.
+The published version is 1.0.1, released in May 2026, but only the major and minor components take part in negotiation, so clients state 1.0; patch releases are corrections and do not affect compatibility. Version 0.3 is still widely implemented. Official SDKs exist for Python, JavaScript, .NET, Go, Java and Rust. The governance position is worth stating to anyone who sees A2A as a Google project: it moved to the Linux Foundation in June 2025, and since 27 August 2026 it has been a Growth Stage project at the Agentic AI Foundation, which also hosts the Model Context Protocol. Microsoft holds one of eight technical steering committee seats.
+Second, the breaking changes in version 1.0.
+JSON-RPC method names changed form, so message/send became SendMessage. The three part types were merged into one Part object. Task states are serialised as names such as TASK_STATE_COMPLETED rather than completed. The Agent Card fields url, preferredTransport and additionalInterfaces were merged into supportedInterfaces. And the blocking parameter was replaced by returnImmediately, with the opposite meaning.
+Third, the Microsoft Foundry status.
+Outbound consumption with the a2a tool at version 1.0 is generally available. The earlier a2a_preview tool at version 0.3 remains in preview for existing integrations. The inbound endpoint, at 1.0 and 0.3, is preview. The Connected Agents tool has been withdrawn from the new Agent Service, and visual workflows retire on 1 December 2026.
+The box at the bottom describes a real inconsistency between samples and documentation: samples and the Azure Developer CLI toolbox flow still create the preview tool at version 0.3, and a request that does not state a version is served 0.3 by default. A developer who starts from a repository will meet it.
+The key takeaway is that new development should target version 1.0, with the version header stated explicitly on every request.</a:t>
+            </a:r>
+            <a:endParaRPr/>
           </a:p>
         </p:txBody>
       </p:sp>
@@ -1506,23 +2586,18 @@
           <a:lstStyle/>
           <a:p>
             <a:r>
-              <a:t>All content traces to these pages, retrieved on 17 September 2026. Two items for whoever presents this subsequently.</a:t>
-            </a:r>
-          </a:p>
-          <a:p>
-            <a:r>
-              <a:t>First, the volatile facts. Release status, the regional availability list, the sixty-day retention period and the software development kit version floors change on Microsoft's release cadence. The A2A tool page and the migration page carry the majority of the status claims in this deck and should be re-checked before presentation.</a:t>
-            </a:r>
-          </a:p>
-          <a:p>
-            <a:r>
-              <a:t>Second, the items that could not be resolved and were therefore deliberately excluded from the slides. No per-request timeout is documented for A2A in Microsoft Foundry, so a value should be measured rather than quoted. Whether a remote A2A target may be reached through a private endpoint is ambiguous: the toolbox network isolation matrix lists A2A as supported through a delegated subnet, while the troubleshooting guidance assumes a publicly resolvable endpoint. And no published documentation relates the A2A task lifecycle to Foundry's long-running agent capability; where that question is raised, the accurate answer is that the relationship is not currently documented.</a:t>
-            </a:r>
-          </a:p>
-          <a:p>
-            <a:r>
-              <a:t>Anticipated question: where should a developer begin? The delegation sample in the foundry-samples repository, having first read the A2A tool page, since the sample creates the preview tool type.</a:t>
-            </a:r>
+              <a:rPr lang="en-US"/>
+              <a:t>This slide lists the sources behind every statement in the deck, retrieved on 17 September 2026.
+The core idea is that A2A status changes quickly, so two things matter for anyone presenting this deck later.
+First, the volatile facts.
+Release status, the regional availability list, the sixty-day retention period and the SDK version floors change on Microsoft's release cadence. The A2A tool page and the migration page carry most of the status claims in the deck and should be checked again before presenting.
+Second, the items that could not be resolved, and were therefore kept off the slides.
+No per-request timeout is documented for A2A in Microsoft Foundry, so a value should be measured rather than quoted. Whether a remote A2A target can be reached through a private endpoint is ambiguous: the toolbox network isolation matrix lists A2A as supported through a delegated subnet, while the troubleshooting guidance assumes a publicly resolvable endpoint. And no published documentation relates the A2A task lifecycle to Foundry's long-running agent capability; when that question comes up, the accurate answer is that the relationship is not currently documented.
+The left column holds the specification and protocol pages, including the normative data model in the a2aproject GitHub repository. The right column holds the Microsoft Foundry and Agent Framework pages, plus the delegation sample in the foundry-samples repository.
+For a developer, the recommended starting point is the A2A tool page, followed by the delegation sample, keeping in mind that the sample creates the preview tool type.
+The key takeaway is to treat this deck as a snapshot of 17 September 2026, and to re-check status before any customer commitment.</a:t>
+            </a:r>
+            <a:endParaRPr/>
           </a:p>
         </p:txBody>
       </p:sp>
@@ -1591,28 +2666,116 @@
           <a:lstStyle/>
           <a:p>
             <a:r>
-              <a:t>The definition is deliberately narrow. A2A standardises three things: how an agent describes itself, how a unit of work is identified and tracked through a defined state machine, and how content moves between the two parties. It does not standardise reasoning, planning, memory or tool invocation.</a:t>
-            </a:r>
-          </a:p>
-          <a:p>
-            <a:r>
-              <a:t>The principle with the greatest architectural consequence is opaque execution. Neither party exposes its prompts, plans or tool implementations. This is what permits integration across organisational boundaries without disclosing implementation detail, and it is also why A2A cannot be used to inspect or debug a remote agent's behaviour.</a:t>
-            </a:r>
-          </a:p>
-          <a:p>
-            <a:r>
-              <a:t>Asynchronous-first is the second principle to note. Interruption for additional input or credentials is modelled as a normal state, not an error. Integrations built on the assumption that a call either returns a result or fails will not handle this correctly.</a:t>
-            </a:r>
-          </a:p>
-          <a:p>
-            <a:r>
-              <a:t>The out-of-scope items are equally significant for design. In particular, the absence of a standard registry interface means that discovery at scale remains an implementation decision, typically the well-known URI or direct configuration.</a:t>
-            </a:r>
-          </a:p>
-          <a:p>
-            <a:r>
-              <a:t>Anticipated question: does opacity prevent compliance auditing? No. Task state transitions and exchanged artifacts are observable; only internal reasoning is not.</a:t>
-            </a:r>
+              <a:rPr lang="en-US"/>
+              <a:t>A2A is an open standard for collaboration between independent agents.</a:t>
+            </a:r>
+          </a:p>
+          <a:p>
+            <a:r>
+              <a:rPr lang="en-US"/>
+              <a:t>It allows agents to discover declared capabilities, exchange different content types and manage shared tasks, without exposing their prompts, memory, tools or internal reasoning.</a:t>
+            </a:r>
+          </a:p>
+          <a:p>
+            <a:r>
+              <a:rPr lang="en-US"/>
+              <a:t>The design is intentionally:</a:t>
+            </a:r>
+          </a:p>
+          <a:p>
+            <a:pPr marL="171450" indent="-171450">
+              <a:buFont typeface="Arial"/>
+              <a:buChar char="•"/>
+            </a:pPr>
+            <a:r>
+              <a:rPr lang="en-US" b="1"/>
+              <a:t>Simple</a:t>
+            </a:r>
+            <a:r>
+              <a:rPr lang="en-US"/>
+              <a:t>, using HTTP, JSON-RPC and Server-Sent Events.</a:t>
+            </a:r>
+          </a:p>
+          <a:p>
+            <a:pPr marL="171450" indent="-171450">
+              <a:buFont typeface="Arial"/>
+              <a:buChar char="•"/>
+            </a:pPr>
+            <a:r>
+              <a:rPr lang="en-US" b="1"/>
+              <a:t>Enterprise-ready</a:t>
+            </a:r>
+            <a:r>
+              <a:rPr lang="en-US"/>
+              <a:t>, relying on established security and observability standards.</a:t>
+            </a:r>
+          </a:p>
+          <a:p>
+            <a:pPr marL="171450" indent="-171450">
+              <a:buFont typeface="Arial"/>
+              <a:buChar char="•"/>
+            </a:pPr>
+            <a:r>
+              <a:rPr lang="en-US" b="1"/>
+              <a:t>Asynchronous-first</a:t>
+            </a:r>
+            <a:r>
+              <a:rPr lang="en-US"/>
+              <a:t>, supporting long-running or interrupted tasks.</a:t>
+            </a:r>
+          </a:p>
+          <a:p>
+            <a:pPr marL="171450" indent="-171450">
+              <a:buFont typeface="Arial"/>
+              <a:buChar char="•"/>
+            </a:pPr>
+            <a:r>
+              <a:rPr lang="en-US" b="1"/>
+              <a:t>Modality-agnostic</a:t>
+            </a:r>
+            <a:r>
+              <a:rPr lang="en-US"/>
+              <a:t>, covering text, files and structured data including images, audio and video through file references.</a:t>
+            </a:r>
+          </a:p>
+          <a:p>
+            <a:pPr marL="171450" indent="-171450">
+              <a:buFont typeface="Arial"/>
+              <a:buChar char="•"/>
+            </a:pPr>
+            <a:r>
+              <a:rPr lang="en-US" b="1"/>
+              <a:t>Opaque</a:t>
+            </a:r>
+            <a:r>
+              <a:rPr lang="en-US"/>
+              <a:t>, so each agent retains control of its implementation.</a:t>
+            </a:r>
+          </a:p>
+          <a:p>
+            <a:r>
+              <a:rPr lang="en-US" dirty="0"/>
+              <a:t>A2A </a:t>
+            </a:r>
+            <a:r>
+              <a:rPr lang="en-US" dirty="0" err="1"/>
+              <a:t>standardises</a:t>
+            </a:r>
+            <a:r>
+              <a:rPr lang="en-US" dirty="0"/>
+              <a:t> only the </a:t>
+            </a:r>
+            <a:r>
+              <a:rPr lang="en-US" b="1" dirty="0"/>
+              <a:t>collaboration boundary</a:t>
+            </a:r>
+            <a:r>
+              <a:rPr lang="en-US" dirty="0"/>
+              <a:t>. It does not define a central registry, credential acquisition, internal agent state or task restart. A completed task cannot resume, so further work requires a new task.</a:t>
+            </a:r>
+          </a:p>
+          <a:p>
+            <a:endParaRPr lang="en-US" dirty="0"/>
           </a:p>
         </p:txBody>
       </p:sp>
@@ -1681,28 +2844,80 @@
           <a:lstStyle/>
           <a:p>
             <a:r>
-              <a:t>This slide states the engineering case rather than the narrative one. Each row is a constraint that appears in practice when agents developed by separate teams are integrated without a common protocol.</a:t>
-            </a:r>
-          </a:p>
-          <a:p>
-            <a:r>
-              <a:t>The first row is the most consequential. Exposing an agent through a tool interface constrains the interaction to a single stateless exchange. An agent that legitimately needs to request clarification before proceeding has no way to express that; the integration either fails or returns a degraded result. The task state machine addresses this directly by modelling suspension as a defined state.</a:t>
-            </a:r>
-          </a:p>
-          <a:p>
-            <a:r>
-              <a:t>The third row concerns integration cost. With bespoke contracts, the number of integration artefacts grows with the number of pairings rather than with the number of agents, and every interface change requires coordinated updates at each counterpart.</a:t>
-            </a:r>
-          </a:p>
-          <a:p>
-            <a:r>
-              <a:t>The fifth row is typically the one that determines whether a design is approved. Without a declared security scheme, each integration establishes its own credential handling, and the resulting inconsistency is difficult to audit.</a:t>
-            </a:r>
-          </a:p>
-          <a:p>
-            <a:r>
-              <a:t>Anticipated question: can these constraints be addressed without adopting a protocol? They can, for a small and stable set of integrations. The cost becomes significant when counterparts are externally owned and change independently.</a:t>
-            </a:r>
+              <a:rPr lang="en-US"/>
+              <a:t>This slide explains why direct, point-to-point agent integration does not scale.</a:t>
+            </a:r>
+          </a:p>
+          <a:p>
+            <a:r>
+              <a:rPr lang="en-US"/>
+              <a:t>First, treating an agent as a simple callable tool reduces collaboration to a stateless request and response. A2A introduces a persistent </a:t>
+            </a:r>
+            <a:r>
+              <a:rPr lang="en-US" b="1"/>
+              <a:t>task object</a:t>
+            </a:r>
+            <a:r>
+              <a:rPr lang="en-US"/>
+              <a:t>, supporting progress updates, clarification and input-required states.</a:t>
+            </a:r>
+          </a:p>
+          <a:p>
+            <a:r>
+              <a:rPr lang="en-US"/>
+              <a:t>Second, agents need a machine-readable way to describe themselves. The </a:t>
+            </a:r>
+            <a:r>
+              <a:rPr lang="en-US" b="1"/>
+              <a:t>Agent Card</a:t>
+            </a:r>
+            <a:r>
+              <a:rPr lang="en-US"/>
+              <a:t> declares capabilities, supported modalities, interfaces and security requirements.</a:t>
+            </a:r>
+          </a:p>
+          <a:p>
+            <a:r>
+              <a:rPr lang="en-US"/>
+              <a:t>Third, custom contracts create tight coupling between every agent pair. A2A provides one shared operation set and data model, independent of framework or vendor.</a:t>
+            </a:r>
+          </a:p>
+          <a:p>
+            <a:r>
+              <a:rPr lang="en-US"/>
+              <a:t>Fourth, A2A assigns consistent </a:t>
+            </a:r>
+            <a:r>
+              <a:rPr lang="en-US" b="1"/>
+              <a:t>task and context identifiers</a:t>
+            </a:r>
+            <a:r>
+              <a:rPr lang="en-US"/>
+              <a:t>. This improves correlation, monitoring and audit across the complete interaction.</a:t>
+            </a:r>
+          </a:p>
+          <a:p>
+            <a:r>
+              <a:rPr lang="en-US"/>
+              <a:t>Finally, authentication requirements are declared through standard security schemes rather than designed separately for each integration.</a:t>
+            </a:r>
+          </a:p>
+          <a:p>
+            <a:r>
+              <a:rPr lang="en-US" dirty="0"/>
+              <a:t>The key takeaway is that A2A replaces bespoke agent connections with a </a:t>
+            </a:r>
+            <a:r>
+              <a:rPr lang="en-US" b="1" dirty="0"/>
+              <a:t>standard, stateful and discoverable collaboration contract</a:t>
+            </a:r>
+            <a:r>
+              <a:rPr lang="en-US" dirty="0"/>
+              <a:t>. It does not remove integration work, but it makes that work consistent and reusable.</a:t>
+            </a:r>
+          </a:p>
+          <a:p>
+            <a:endParaRPr lang="en-US" dirty="0"/>
           </a:p>
         </p:txBody>
       </p:sp>
@@ -1771,33 +2986,96 @@
           <a:lstStyle/>
           <a:p>
             <a:r>
-              <a:t>The two protocols address different integration axes and are routinely used together in the same system.</a:t>
-            </a:r>
-          </a:p>
-          <a:p>
-            <a:r>
-              <a:t>The Model Context Protocol connects one agent to the tools, resources and context it uses to perform its own work. Those endpoints have fixed schemas, are typically stateless, and usually sit within the same ownership boundary as the agent itself. A2A connects agents to each other, where the counterpart performs its own reasoning, maintains state across turns, and is frequently operated by a different party.</a:t>
-            </a:r>
-          </a:p>
-          <a:p>
-            <a:r>
-              <a:t>The dashed boundaries in the diagram carry the architectural point. Every A2A connection shown crosses one; no Model Context Protocol connection does. That is the practical selection criterion, and it is organisational as much as technical.</a:t>
-            </a:r>
-          </a:p>
-          <a:p>
-            <a:r>
-              <a:t>The specification describes the relationship in terms of depth and reach: the Model Context Protocol increases the capability of an individual agent, while A2A increases the set of agents a system can coordinate.</a:t>
-            </a:r>
-          </a:p>
-          <a:p>
-            <a:r>
-              <a:t>Since 27 August 2026 both specifications are hosted by the Agentic AI Foundation, which removes any question of competing direction.</a:t>
-            </a:r>
-          </a:p>
-          <a:p>
-            <a:r>
-              <a:t>Anticipated question: can an A2A server also expose its skills through the Model Context Protocol? Yes, for well-defined stateless skills. The stateful task lifecycle is not preserved in that form.</a:t>
-            </a:r>
+              <a:rPr lang="en-US" dirty="0"/>
+              <a:t>This slide places </a:t>
+            </a:r>
+            <a:r>
+              <a:rPr lang="en-US" b="1" dirty="0"/>
+              <a:t>A2A and the Model Context Protocol in one multi-agent system.</a:t>
+            </a:r>
+            <a:r>
+              <a:rPr lang="en-US" dirty="0"/>
+              <a:t> Read it from top to bottom: A2A connects agents across ownership boundaries, and the Model Context Protocol connects each agent to its own resources.
+</a:t>
+            </a:r>
+            <a:r>
+              <a:rPr lang="en-US"/>
+              <a:t>The core idea is that the two protocols address different integration axes and are routinely used together.</a:t>
+            </a:r>
+            <a:endParaRPr lang="en-US" dirty="0"/>
+          </a:p>
+          <a:p>
+            <a:r>
+              <a:rPr lang="en-US" dirty="0"/>
+              <a:t>
+</a:t>
+            </a:r>
+            <a:r>
+              <a:rPr lang="en-US" b="1" dirty="0"/>
+              <a:t>Model Context Protocol.</a:t>
+            </a:r>
+            <a:r>
+              <a:rPr lang="en-US" dirty="0"/>
+              <a:t>
+It</a:t>
+            </a:r>
+            <a:r>
+              <a:rPr lang="en-US" b="1" dirty="0"/>
+              <a:t> connects one agent to the tools</a:t>
+            </a:r>
+            <a:r>
+              <a:rPr lang="en-US" dirty="0"/>
+              <a:t>, resources and context it uses to do its own work: in the example, the concierge agent's policy database and pricing API. These endpoints have fixed schemas, are typically stateless, and usually sit inside the same ownership boundary as the agent.
+</a:t>
+            </a:r>
+            <a:r>
+              <a:rPr lang="en-US" b="1" dirty="0"/>
+              <a:t>A2A.</a:t>
+            </a:r>
+            <a:r>
+              <a:rPr lang="en-US" dirty="0"/>
+              <a:t>
+It </a:t>
+            </a:r>
+            <a:r>
+              <a:rPr lang="en-US" b="1" dirty="0"/>
+              <a:t>connects agents to each other.</a:t>
+            </a:r>
+            <a:r>
+              <a:rPr lang="en-US" dirty="0"/>
+              <a:t> The counterpart performs its own reasoning, keeps state across turns, and is often operated by a different party: here, a claims agent in another business unit and a logistics agent at a partner </a:t>
+            </a:r>
+            <a:r>
+              <a:rPr lang="en-US" err="1"/>
+              <a:t>organisation.</a:t>
+            </a:r>
+            <a:r>
+              <a:rPr lang="en-US" dirty="0"/>
+              <a:t>
+The dashed boundaries carry the architectural point. Every A2A connection on the diagram crosses one; no Model Context Protocol connection does. That is the practical selection criterion, and it is </a:t>
+            </a:r>
+            <a:r>
+              <a:rPr lang="en-US" err="1"/>
+              <a:t>organisational as much as technical.</a:t>
+            </a:r>
+            <a:r>
+              <a:rPr lang="en-US" dirty="0"/>
+              <a:t>
+The</a:t>
+            </a:r>
+            <a:r>
+              <a:rPr lang="en-US" b="1" dirty="0"/>
+              <a:t> specification describes the relationship in terms of depth and reach</a:t>
+            </a:r>
+            <a:r>
+              <a:rPr lang="en-US" dirty="0"/>
+              <a:t>:</a:t>
+            </a:r>
+            <a:r>
+              <a:rPr lang="en-US" i="1"/>
+              <a:t> the Model Context Protocol increases what an individual agent can do, while A2A increases the set of agents a system can coordinate. </a:t>
+            </a:r>
+            <a:endParaRPr lang="en-US"/>
           </a:p>
         </p:txBody>
       </p:sp>
@@ -1866,28 +3144,149 @@
           <a:lstStyle/>
           <a:p>
             <a:r>
-              <a:t>These six objects constitute the complete data model. Every operation in the protocol accepts or returns some combination of them.</a:t>
-            </a:r>
-          </a:p>
-          <a:p>
-            <a:r>
-              <a:t>The distinction between Message and Artifact is the one most often implemented incorrectly, and the specification is explicit about it. Messages carry the conversational exchange; artifacts carry the result. Where an implementation returns its output inside message text, every consumer must parse unstructured content to extract it, which defeats the purpose of a typed content model.</a:t>
-            </a:r>
-          </a:p>
-          <a:p>
-            <a:r>
-              <a:t>Two further points. Task identifiers are always generated by the server; a client cannot supply one when creating work, which affects how idempotency is designed. Context identifiers are the value to carry in application logs, because one user-visible conversation typically produces several tasks, and refining a completed task requires creating a new one within the same context.</a:t>
-            </a:r>
-          </a:p>
-          <a:p>
-            <a:r>
-              <a:t>The Part object is the most significant breaking change relative to version 0.3. The earlier TextPart, FilePart and DataPart types were consolidated into a single object discriminated by which content field is populated, with mimeType renamed to mediaType.</a:t>
-            </a:r>
-          </a:p>
-          <a:p>
-            <a:r>
-              <a:t>Anticipated question: is there a maximum content size? The specification does not define one; the transport and the implementation do.</a:t>
-            </a:r>
+              <a:rPr lang="en-US"/>
+              <a:t>A2A version 1.0 uses six core objects to describe the complete collaboration lifecycle.</a:t>
+            </a:r>
+          </a:p>
+          <a:p>
+            <a:r>
+              <a:rPr lang="en-US" b="1" dirty="0"/>
+              <a:t>Agent Card</a:t>
+            </a:r>
+            <a:r>
+              <a:rPr lang="en-US" dirty="0"/>
+              <a:t> is the capability manifest. It tells other agents what an agent can do, how to reach it, which content types it supports and which security schemes apply.</a:t>
+            </a:r>
+          </a:p>
+          <a:p>
+            <a:r>
+              <a:rPr lang="en-US" b="1"/>
+              <a:t>Context</a:t>
+            </a:r>
+            <a:r>
+              <a:rPr lang="en-US"/>
+              <a:t> is the correlation boundary. It groups related messages and tasks into one logical conversation, including follow-up tasks created to refine earlier results.</a:t>
+            </a:r>
+          </a:p>
+          <a:p>
+            <a:r>
+              <a:rPr lang="en-US" b="1"/>
+              <a:t>Message</a:t>
+            </a:r>
+            <a:r>
+              <a:rPr lang="en-US"/>
+              <a:t> represents a conversational turn from either the user or an agent.</a:t>
+            </a:r>
+          </a:p>
+          <a:p>
+            <a:r>
+              <a:rPr lang="en-US"/>
+              <a:t>Each message contains one or more </a:t>
+            </a:r>
+            <a:r>
+              <a:rPr lang="en-US" b="1"/>
+              <a:t>Parts</a:t>
+            </a:r>
+            <a:r>
+              <a:rPr lang="en-US"/>
+              <a:t>. A Part is the actual content unit and carries exactly one payload type: text, raw bytes, a referenced file or structured data. </a:t>
+            </a:r>
+            <a:r>
+              <a:rPr lang="en-US" b="1"/>
+              <a:t>It is simply a piece of content inside an A2A Message or Artifact.</a:t>
+            </a:r>
+          </a:p>
+          <a:p>
+            <a:endParaRPr lang="en-US" dirty="0"/>
+          </a:p>
+          <a:p>
+            <a:r>
+              <a:rPr lang="en-US"/>
+              <a:t>When the interaction becomes actionable, the server creates a </a:t>
+            </a:r>
+            <a:r>
+              <a:rPr lang="en-US" b="1"/>
+              <a:t>Task</a:t>
+            </a:r>
+            <a:r>
+              <a:rPr lang="en-US"/>
+              <a:t>. The Task is the </a:t>
+            </a:r>
+            <a:r>
+              <a:rPr lang="en-US" b="1"/>
+              <a:t>durable unit of work, with its own identifier, lifecycle state, message history and associated outputs.</a:t>
+            </a:r>
+          </a:p>
+          <a:p>
+            <a:r>
+              <a:rPr lang="en-US"/>
+              <a:t>Those outputs are returned as </a:t>
+            </a:r>
+            <a:r>
+              <a:rPr lang="en-US" b="1"/>
+              <a:t>Artifacts</a:t>
+            </a:r>
+            <a:r>
+              <a:rPr lang="en-US"/>
+              <a:t>. An Artifact contains one or more Parts and represents a defined task result, such as a report, image, data object or referenced file.</a:t>
+            </a:r>
+          </a:p>
+          <a:p>
+            <a:r>
+              <a:rPr lang="en-US"/>
+              <a:t>The critical distinction is between </a:t>
+            </a:r>
+            <a:r>
+              <a:rPr lang="en-US" b="1"/>
+              <a:t>Messages and Artifacts</a:t>
+            </a:r>
+            <a:r>
+              <a:rPr lang="en-US"/>
+              <a:t>:</a:t>
+            </a:r>
+          </a:p>
+          <a:p>
+            <a:pPr marL="171450" indent="-171450">
+              <a:buFont typeface="Arial"/>
+              <a:buChar char="•"/>
+            </a:pPr>
+            <a:r>
+              <a:rPr lang="en-US" b="1"/>
+              <a:t>Messages carry the conversation.</a:t>
+            </a:r>
+          </a:p>
+          <a:p>
+            <a:pPr marL="171450" indent="-171450">
+              <a:buFont typeface="Arial"/>
+              <a:buChar char="•"/>
+            </a:pPr>
+            <a:r>
+              <a:rPr lang="en-US" b="1"/>
+              <a:t>Tasks track the work.</a:t>
+            </a:r>
+          </a:p>
+          <a:p>
+            <a:pPr marL="171450" indent="-171450">
+              <a:buFont typeface="Arial"/>
+              <a:buChar char="•"/>
+            </a:pPr>
+            <a:r>
+              <a:rPr lang="en-US" b="1"/>
+              <a:t>Artifacts carry the results.</a:t>
+            </a:r>
+          </a:p>
+          <a:p>
+            <a:r>
+              <a:rPr lang="en-US"/>
+              <a:t>The end-to-end model is therefore: </a:t>
+            </a:r>
+            <a:r>
+              <a:rPr lang="en-US" b="1"/>
+              <a:t>discover through the Agent Card, correlate through Context, communicate with Messages and Parts, execute through a Task, and return results as Artifacts.</a:t>
+            </a:r>
+          </a:p>
+          <a:p>
+            <a:endParaRPr lang="en-US" dirty="0"/>
           </a:p>
         </p:txBody>
       </p:sp>
@@ -1956,28 +3355,199 @@
           <a:lstStyle/>
           <a:p>
             <a:r>
-              <a:t>The Agent Card is the first object a client retrieves and it determines everything that follows: which endpoint to call, which binding and protocol version to use, which content types are accepted, and which security scheme applies.</a:t>
-            </a:r>
-          </a:p>
-          <a:p>
-            <a:r>
-              <a:t>Two fields deserve attention. supportedInterfaces is an ordered list, and the ordering is normative: clients select the first interface whose binding they support, so the server expresses preference through sequence. Version 1.0 consolidated the earlier url, preferredTransport and additionalInterfaces fields into this single structure, and moved protocolVersion from the card onto each interface, which permits one agent to serve multiple protocol versions concurrently.</a:t>
-            </a:r>
-          </a:p>
-          <a:p>
-            <a:r>
-              <a:t>capabilities declares what the agent supports rather than what it will do. A client that requires streaming must verify capabilities.streaming before subscribing, rather than attempting the call and handling the failure.</a:t>
-            </a:r>
-          </a:p>
-          <a:p>
-            <a:r>
-              <a:t>Card signing is optional but relevant where cards are retrieved from a registry rather than directly from the agent's own domain, since it allows a consumer to verify the card was not modified in transit.</a:t>
-            </a:r>
-          </a:p>
-          <a:p>
-            <a:r>
-              <a:t>Anticipated question: how should cards be cached? Using standard HTTP cache headers and entity tags, with the card version monitored for change.</a:t>
-            </a:r>
+              <a:rPr lang="en-US" dirty="0"/>
+              <a:t>he </a:t>
+            </a:r>
+            <a:r>
+              <a:rPr lang="en-US" b="1" dirty="0"/>
+              <a:t>Agent Card</a:t>
+            </a:r>
+            <a:r>
+              <a:rPr lang="en-US" dirty="0"/>
+              <a:t> is the machine-readable description a client retrieves before interacting with an A2A agent.</a:t>
+            </a:r>
+          </a:p>
+          <a:p>
+            <a:r>
+              <a:rPr lang="en-US"/>
+              <a:t>Think of it as the agent’s capability and connectivity manifest. It answers four practical questions:</a:t>
+            </a:r>
+          </a:p>
+          <a:p>
+            <a:pPr marL="171450" indent="-171450">
+              <a:buFont typeface="Arial"/>
+              <a:buChar char="•"/>
+            </a:pPr>
+            <a:r>
+              <a:rPr lang="en-US"/>
+              <a:t>What is this agent?</a:t>
+            </a:r>
+          </a:p>
+          <a:p>
+            <a:pPr marL="171450" indent="-171450">
+              <a:buFont typeface="Arial"/>
+              <a:buChar char="•"/>
+            </a:pPr>
+            <a:r>
+              <a:rPr lang="en-US"/>
+              <a:t>What can it do?</a:t>
+            </a:r>
+          </a:p>
+          <a:p>
+            <a:pPr marL="171450" indent="-171450">
+              <a:buFont typeface="Arial"/>
+              <a:buChar char="•"/>
+            </a:pPr>
+            <a:r>
+              <a:rPr lang="en-US"/>
+              <a:t>How can I communicate with it?</a:t>
+            </a:r>
+          </a:p>
+          <a:p>
+            <a:pPr marL="171450" indent="-171450">
+              <a:buFont typeface="Arial"/>
+              <a:buChar char="•"/>
+            </a:pPr>
+            <a:r>
+              <a:rPr lang="en-US"/>
+              <a:t>How must the connection be secured?</a:t>
+            </a:r>
+          </a:p>
+          <a:p>
+            <a:pPr marL="171450" indent="-171450">
+              <a:buFont typeface="Arial"/>
+              <a:buChar char="•"/>
+            </a:pPr>
+            <a:endParaRPr lang="en-US" dirty="0"/>
+          </a:p>
+          <a:p>
+            <a:r>
+              <a:rPr lang="en-US"/>
+              <a:t>The </a:t>
+            </a:r>
+            <a:r>
+              <a:rPr lang="en-US" b="1"/>
+              <a:t>supported interfaces</a:t>
+            </a:r>
+            <a:r>
+              <a:rPr lang="en-US"/>
+              <a:t> declare the available endpoint, protocol binding and protocol version. The list is ordered, so the first interface represents the agent’s preferred option. Multiple entries allow one agent to support several protocol versions or bindings during migration.</a:t>
+            </a:r>
+          </a:p>
+          <a:p>
+            <a:r>
+              <a:rPr lang="en-US" dirty="0"/>
+              <a:t>The </a:t>
+            </a:r>
+            <a:r>
+              <a:rPr lang="en-US" b="1" dirty="0"/>
+              <a:t>capabilities</a:t>
+            </a:r>
+            <a:r>
+              <a:rPr lang="en-US" dirty="0"/>
+              <a:t> indicate optional protocol </a:t>
+            </a:r>
+            <a:r>
+              <a:rPr lang="en-US" dirty="0" err="1"/>
+              <a:t>behaviours</a:t>
+            </a:r>
+            <a:r>
+              <a:rPr lang="en-US" dirty="0"/>
+              <a:t>, such as streaming, push notifications or access to an extended Agent Card.</a:t>
+            </a:r>
+          </a:p>
+          <a:p>
+            <a:r>
+              <a:rPr lang="en-US"/>
+              <a:t>The </a:t>
+            </a:r>
+            <a:r>
+              <a:rPr lang="en-US" b="1"/>
+              <a:t>input and output modes</a:t>
+            </a:r>
+            <a:r>
+              <a:rPr lang="en-US"/>
+              <a:t> declare the media types the agent accepts and produces. These could include text, structured data or files, depending on the agent.</a:t>
+            </a:r>
+          </a:p>
+          <a:p>
+            <a:r>
+              <a:rPr lang="en-US"/>
+              <a:t>The </a:t>
+            </a:r>
+            <a:r>
+              <a:rPr lang="en-US" b="1"/>
+              <a:t>skills</a:t>
+            </a:r>
+            <a:r>
+              <a:rPr lang="en-US"/>
+              <a:t> describe the business capabilities exposed by the agent. In this example, the agent publishes a skill for assessing insurance claims. Skills support discovery and routing, but they do not expose the agent’s internal prompts, tools or implementation.</a:t>
+            </a:r>
+          </a:p>
+          <a:p>
+            <a:r>
+              <a:rPr lang="en-US"/>
+              <a:t>Security schemes are declared alongside the interface, while credentials are acquired through a separate process.</a:t>
+            </a:r>
+          </a:p>
+          <a:p>
+            <a:r>
+              <a:rPr lang="en-US"/>
+              <a:t>There are three common discovery patterns:</a:t>
+            </a:r>
+          </a:p>
+          <a:p>
+            <a:pPr marL="171450" indent="-171450">
+              <a:buFont typeface="Arial"/>
+              <a:buChar char="•"/>
+            </a:pPr>
+            <a:r>
+              <a:rPr lang="en-US"/>
+              <a:t>A </a:t>
+            </a:r>
+            <a:r>
+              <a:rPr lang="en-US" b="1"/>
+              <a:t>well-known URI</a:t>
+            </a:r>
+            <a:r>
+              <a:rPr lang="en-US"/>
+              <a:t> provides standard HTTP-based discovery.</a:t>
+            </a:r>
+          </a:p>
+          <a:p>
+            <a:pPr marL="171450" indent="-171450">
+              <a:buFont typeface="Arial"/>
+              <a:buChar char="•"/>
+            </a:pPr>
+            <a:r>
+              <a:rPr lang="en-US"/>
+              <a:t>A </a:t>
+            </a:r>
+            <a:r>
+              <a:rPr lang="en-US" b="1"/>
+              <a:t>curated registry</a:t>
+            </a:r>
+            <a:r>
+              <a:rPr lang="en-US"/>
+              <a:t> allows agents to be searched by capability, provider or tags.</a:t>
+            </a:r>
+          </a:p>
+          <a:p>
+            <a:pPr marL="171450" indent="-171450">
+              <a:buFont typeface="Arial"/>
+              <a:buChar char="•"/>
+            </a:pPr>
+            <a:r>
+              <a:rPr lang="en-US" b="1"/>
+              <a:t>Direct configuration</a:t>
+            </a:r>
+            <a:r>
+              <a:rPr lang="en-US"/>
+              <a:t> supplies the endpoint and credentials explicitly, which is common for private integrations.</a:t>
+            </a:r>
+          </a:p>
+          <a:p>
+            <a:endParaRPr lang="en-US" dirty="0"/>
           </a:p>
         </p:txBody>
       </p:sp>
@@ -2046,28 +3616,19 @@
           <a:lstStyle/>
           <a:p>
             <a:r>
-              <a:t>Version 1.0 restructured the specification into three layers: a canonical data model defined in protocol buffers, an abstract operation set, and bindings that map those operations onto a concrete transport. The operations are identical across bindings; only their expression differs.</a:t>
-            </a:r>
-          </a:p>
-          <a:p>
-            <a:r>
-              <a:t>The right-hand column documents the 0.3 method names because that is where most migration effort is spent. Version 1.0 replaced the namespaced, lowercase form with the PascalCase operation name, so message/send became SendMessage. Software development kits distinguish the two by inspecting the method name and dispatching accordingly, which means a version mismatch produces an incorrect dispatch rather than an explicit error.</a:t>
-            </a:r>
-          </a:p>
-          <a:p>
-            <a:r>
-              <a:t>Note the version negotiation rule in the lower right. An absent A2A-Version header is interpreted as version 0.3, in accordance with the specification. A client built against 1.0 that omits the header will therefore be served the earlier protocol version, with different method names and a different content model.</a:t>
-            </a:r>
-          </a:p>
-          <a:p>
-            <a:r>
-              <a:t>The push notification configuration operations are frequently overlooked. They exist because a webhook registration is itself a managed resource with a lifecycle.</a:t>
-            </a:r>
-          </a:p>
-          <a:p>
-            <a:r>
-              <a:t>Anticipated question: which binding should be selected? Where Microsoft Foundry is a participant, JSON-RPC, since it is the only binding supported at protocol version 1.0.</a:t>
-            </a:r>
+              <a:rPr lang="en-US"/>
+              <a:t>This slide lists the eleven A2A operations and how they are expressed across the three standard bindings.
+The core idea is that version 1.0 restructured the specification into three layers: a canonical data model defined in protocol buffers, an abstract operation set, and bindings that map those operations onto a concrete transport. The operations are identical across bindings; only their expression differs.
+First, the operation table.
+The left column gives the operation, which in version 1.0 is also the JSON-RPC method name. The middle column shows the HTTP+JSON resource path. The right column gives the version 0.3 method name, because that is where most migration effort is spent. Version 1.0 replaced the namespaced, lowercase form with the PascalCase operation name, so message/send became SendMessage. SDKs tell the two apart by inspecting the method name, which means a version mismatch produces an incorrect dispatch rather than an explicit error.
+The push notification configuration operations are often overlooked. They exist because a webhook registration is itself a managed resource with a lifecycle.
+Second, the transport bindings.
+JSON-RPC 2.0 over HTTP, gRPC with protocol buffers over HTTP/2, and HTTP+JSON using the application/a2a+json media type. Where Microsoft Foundry is a participant, JSON-RPC is the binding to choose, since it is the only one Foundry supports at protocol version 1.0.
+Third, version negotiation.
+The version is stated in the A2A-Version header or as a query parameter. When the header is absent, the request is interpreted as version 0.3, as the specification requires. A client built for 1.0 that omits the header is therefore served the earlier protocol, with different method names and a different content model. An unsupported version returns VersionNotSupportedError, and patch versions are excluded from negotiation.
+The key takeaway is that every request should state A2A-Version 1.0 explicitly.</a:t>
+            </a:r>
+            <a:endParaRPr/>
           </a:p>
         </p:txBody>
       </p:sp>
@@ -2136,28 +3697,22 @@
           <a:lstStyle/>
           <a:p>
             <a:r>
-              <a:t>The state machine is owned by the server and is not advisory. Both parties interpret the same set of states, which is what makes uniform monitoring across heterogeneous agents possible.</a:t>
-            </a:r>
-          </a:p>
-          <a:p>
-            <a:r>
-              <a:t>Three transitions matter in design. First, submitted to working, which is when the server has accepted the task and generated its identifier. Second, working to an interrupted state: the agent requires additional input from the user, or credentials for a downstream system, and suspends rather than failing. A client that treats any non-terminal return as an error will handle this incorrectly. Third, the transition into one of the four terminal states, after which the task is immutable.</a:t>
-            </a:r>
-          </a:p>
-          <a:p>
-            <a:r>
-              <a:t>Terminal immutability has a direct consequence for application design. A request to refine a completed result is a new task, carrying the same context identifier. Implementations that attempt to send a further message to a terminal task receive an unsupported-operation error.</a:t>
-            </a:r>
-          </a:p>
-          <a:p>
-            <a:r>
-              <a:t>The enumeration table is included because these are the literal serialised values in version 1.0. Code written against the 0.3 lowercase forms will not match.</a:t>
-            </a:r>
-          </a:p>
-          <a:p>
-            <a:r>
-              <a:t>Anticipated question: how is a dropped connection recovered? By subscribing to the task again; the stream restarts with a complete Task object so no state is lost.</a:t>
-            </a:r>
+              <a:rPr lang="en-US"/>
+              <a:t>This slide shows the task state model: a state machine owned by the server and read identically by both parties. Read the diagram from left to right, with the enumeration table on the right.
+The core idea is that the state machine is not advisory. Both parties interpret the same states, which is what makes uniform monitoring across heterogeneous agents possible.
+Three transitions matter in design.
+First, submitted to working.
+This is the point at which the server has accepted the task and generated its identifier.
+Second, working to an interrupted state.
+The agent needs more input from the user, input-required, or credentials for a downstream system, auth-required, and it suspends rather than failing. A client that treats any non-terminal return as an error will handle this incorrectly.
+Third, the move into a terminal state.
+Completed, failed, canceled and rejected are terminal, and after that the task cannot change. This has a direct consequence for application design: a request to refine a completed result is a new task carrying the same context identifier, and a further message sent to a terminal task returns an unsupported-operation error.
+Artifacts are appended as output is produced, so results can build up while the task is still working.
+The enumeration table is included because these are the literal values serialised in version 1.0, following the ProtoJSON convention, for example TASK_STATE_INPUT_REQUIRED. Version 0.3 used lowercase hyphenated forms such as input-required, and code written against those forms will not match.
+A common question is how a dropped connection is recovered. The client subscribes to the task again; the stream restarts with a complete Task object, so no state is lost.
+The key takeaway is that interruption is a normal state and completion is final, and clients must be designed for both.</a:t>
+            </a:r>
+            <a:endParaRPr/>
           </a:p>
         </p:txBody>
       </p:sp>
@@ -2360,7 +3915,7 @@
           <a:p>
             <a:fld id="{5BCAD085-E8A6-8845-BD4E-CB4CCA059FC4}" type="datetimeFigureOut">
               <a:rPr lang="en-US" smtClean="0"/>
-              <a:t>10/11/2026</a:t>
+              <a:t>10/15/2026</a:t>
             </a:fld>
             <a:endParaRPr lang="en-US"/>
           </a:p>
@@ -2528,7 +4083,7 @@
           <a:p>
             <a:fld id="{5BCAD085-E8A6-8845-BD4E-CB4CCA059FC4}" type="datetimeFigureOut">
               <a:rPr lang="en-US" smtClean="0"/>
-              <a:t>10/11/2026</a:t>
+              <a:t>10/15/2026</a:t>
             </a:fld>
             <a:endParaRPr lang="en-US"/>
           </a:p>
@@ -2706,7 +4261,7 @@
           <a:p>
             <a:fld id="{5BCAD085-E8A6-8845-BD4E-CB4CCA059FC4}" type="datetimeFigureOut">
               <a:rPr lang="en-US" smtClean="0"/>
-              <a:t>10/11/2026</a:t>
+              <a:t>10/15/2026</a:t>
             </a:fld>
             <a:endParaRPr lang="en-US"/>
           </a:p>
@@ -2874,7 +4429,7 @@
           <a:p>
             <a:fld id="{5BCAD085-E8A6-8845-BD4E-CB4CCA059FC4}" type="datetimeFigureOut">
               <a:rPr lang="en-US" smtClean="0"/>
-              <a:t>10/11/2026</a:t>
+              <a:t>10/15/2026</a:t>
             </a:fld>
             <a:endParaRPr lang="en-US"/>
           </a:p>
@@ -3119,7 +4674,7 @@
           <a:p>
             <a:fld id="{5BCAD085-E8A6-8845-BD4E-CB4CCA059FC4}" type="datetimeFigureOut">
               <a:rPr lang="en-US" smtClean="0"/>
-              <a:t>10/11/2026</a:t>
+              <a:t>10/15/2026</a:t>
             </a:fld>
             <a:endParaRPr lang="en-US"/>
           </a:p>
@@ -3404,7 +4959,7 @@
           <a:p>
             <a:fld id="{5BCAD085-E8A6-8845-BD4E-CB4CCA059FC4}" type="datetimeFigureOut">
               <a:rPr lang="en-US" smtClean="0"/>
-              <a:t>10/11/2026</a:t>
+              <a:t>10/15/2026</a:t>
             </a:fld>
             <a:endParaRPr lang="en-US"/>
           </a:p>
@@ -3823,7 +5378,7 @@
           <a:p>
             <a:fld id="{5BCAD085-E8A6-8845-BD4E-CB4CCA059FC4}" type="datetimeFigureOut">
               <a:rPr lang="en-US" smtClean="0"/>
-              <a:t>10/11/2026</a:t>
+              <a:t>10/15/2026</a:t>
             </a:fld>
             <a:endParaRPr lang="en-US"/>
           </a:p>
@@ -3940,7 +5495,7 @@
           <a:p>
             <a:fld id="{5BCAD085-E8A6-8845-BD4E-CB4CCA059FC4}" type="datetimeFigureOut">
               <a:rPr lang="en-US" smtClean="0"/>
-              <a:t>10/11/2026</a:t>
+              <a:t>10/15/2026</a:t>
             </a:fld>
             <a:endParaRPr lang="en-US"/>
           </a:p>
@@ -4035,7 +5590,7 @@
           <a:p>
             <a:fld id="{5BCAD085-E8A6-8845-BD4E-CB4CCA059FC4}" type="datetimeFigureOut">
               <a:rPr lang="en-US" smtClean="0"/>
-              <a:t>10/11/2026</a:t>
+              <a:t>10/15/2026</a:t>
             </a:fld>
             <a:endParaRPr lang="en-US"/>
           </a:p>
@@ -4310,7 +5865,7 @@
           <a:p>
             <a:fld id="{5BCAD085-E8A6-8845-BD4E-CB4CCA059FC4}" type="datetimeFigureOut">
               <a:rPr lang="en-US" smtClean="0"/>
-              <a:t>10/11/2026</a:t>
+              <a:t>10/15/2026</a:t>
             </a:fld>
             <a:endParaRPr lang="en-US"/>
           </a:p>
@@ -4562,7 +6117,7 @@
           <a:p>
             <a:fld id="{5BCAD085-E8A6-8845-BD4E-CB4CCA059FC4}" type="datetimeFigureOut">
               <a:rPr lang="en-US" smtClean="0"/>
-              <a:t>10/11/2026</a:t>
+              <a:t>10/15/2026</a:t>
             </a:fld>
             <a:endParaRPr lang="en-US"/>
           </a:p>
@@ -4773,7 +6328,7 @@
           <a:p>
             <a:fld id="{5BCAD085-E8A6-8845-BD4E-CB4CCA059FC4}" type="datetimeFigureOut">
               <a:rPr lang="en-US" smtClean="0"/>
-              <a:t>10/11/2026</a:t>
+              <a:t>10/15/2026</a:t>
             </a:fld>
             <a:endParaRPr lang="en-US"/>
           </a:p>
@@ -15497,7 +17052,7 @@
 </file>
 
 <file path=ppt/slides/slide15.xml><?xml version="1.0" encoding="utf-8"?>
-<p:sld xmlns:a="http://schemas.openxmlformats.org/drawingml/2006/main" xmlns:r="http://schemas.openxmlformats.org/officeDocument/2006/relationships" xmlns:p="http://schemas.openxmlformats.org/presentationml/2006/main">
+<p:sld xmlns:a="http://schemas.openxmlformats.org/drawingml/2006/main" xmlns:r="http://schemas.openxmlformats.org/officeDocument/2006/relationships" xmlns:p="http://schemas.openxmlformats.org/presentationml/2006/main" show="0">
   <p:cSld>
     <p:spTree>
       <p:nvGrpSpPr>
@@ -20858,7 +22413,7 @@
 </file>
 
 <file path=ppt/slides/slide18.xml><?xml version="1.0" encoding="utf-8"?>
-<p:sld xmlns:a="http://schemas.openxmlformats.org/drawingml/2006/main" xmlns:r="http://schemas.openxmlformats.org/officeDocument/2006/relationships" xmlns:p="http://schemas.openxmlformats.org/presentationml/2006/main">
+<p:sld xmlns:a="http://schemas.openxmlformats.org/drawingml/2006/main" xmlns:r="http://schemas.openxmlformats.org/officeDocument/2006/relationships" xmlns:p="http://schemas.openxmlformats.org/presentationml/2006/main" show="0">
   <p:cSld>
     <p:spTree>
       <p:nvGrpSpPr>
@@ -21284,15 +22839,22 @@
               </a:lnSpc>
             </a:pPr>
             <a:r>
-              <a:rPr sz="800" b="0" i="0" dirty="0">
+              <a:rPr lang="en-US" sz="800" b="0" i="0" dirty="0">
                 <a:solidFill>
                   <a:srgbClr val="44495B"/>
                 </a:solidFill>
                 <a:latin typeface="Segoe UI"/>
                 <a:cs typeface="Segoe UI"/>
               </a:rPr>
-              <a:t>The counterpart is operated by another team, business unit or organisation and changes independently of your release cycle.</a:t>
-            </a:r>
+              <a:t>The counterpart is operated by another team, business unit or organisation and changes independently of the caller's release cycle.</a:t>
+            </a:r>
+            <a:endParaRPr sz="800" b="0" i="0" dirty="0">
+              <a:solidFill>
+                <a:srgbClr val="44495B"/>
+              </a:solidFill>
+              <a:latin typeface="Segoe UI"/>
+              <a:cs typeface="Segoe UI"/>
+            </a:endParaRPr>
           </a:p>
         </p:txBody>
       </p:sp>
@@ -22136,15 +23698,22 @@
               </a:lnSpc>
             </a:pPr>
             <a:r>
-              <a:rPr sz="800" b="0" i="0" dirty="0">
+              <a:rPr lang="en-US" sz="800" b="0" i="0" dirty="0">
                 <a:solidFill>
                   <a:srgbClr val="44495B"/>
                 </a:solidFill>
                 <a:latin typeface="Segoe UI"/>
                 <a:cs typeface="Segoe UI"/>
               </a:rPr>
-              <a:t>Other parties should be able to discover and invoke your agent without a proprietary client library.</a:t>
-            </a:r>
+              <a:t>Other parties should be able to discover and invoke the agent without a proprietary client library.</a:t>
+            </a:r>
+            <a:endParaRPr sz="800" b="0" i="0" dirty="0">
+              <a:solidFill>
+                <a:srgbClr val="44495B"/>
+              </a:solidFill>
+              <a:latin typeface="Segoe UI"/>
+              <a:cs typeface="Segoe UI"/>
+            </a:endParaRPr>
           </a:p>
         </p:txBody>
       </p:sp>
@@ -32928,8 +34497,8 @@
         </p:nvSpPr>
         <p:spPr>
           <a:xfrm>
-            <a:off x="7802684" y="1751076"/>
-            <a:ext cx="3840370" cy="704088"/>
+            <a:off x="7802684" y="1970840"/>
+            <a:ext cx="3840370" cy="264560"/>
           </a:xfrm>
           <a:prstGeom prst="rect">
             <a:avLst/>
@@ -32948,6 +34517,16 @@
               </a:lnSpc>
             </a:pPr>
             <a:r>
+              <a:rPr sz="800" b="1" i="0" dirty="0">
+                <a:solidFill>
+                  <a:srgbClr val="44495B"/>
+                </a:solidFill>
+                <a:latin typeface="Segoe UI"/>
+                <a:cs typeface="Segoe UI"/>
+              </a:rPr>
+              <a:t>A Task objec</a:t>
+            </a:r>
+            <a:r>
               <a:rPr sz="800" b="0" i="0" dirty="0">
                 <a:solidFill>
                   <a:srgbClr val="44495B"/>
@@ -32955,7 +34534,7 @@
                 <a:latin typeface="Segoe UI"/>
                 <a:cs typeface="Segoe UI"/>
               </a:rPr>
-              <a:t>A Task object with a server-owned state machine, including an input-required state that suspends rather than fails.</a:t>
+              <a:t>t with a server-owned state machine, including an input-required state that suspends rather than fails.</a:t>
             </a:r>
           </a:p>
         </p:txBody>
@@ -33084,8 +34663,8 @@
         </p:nvSpPr>
         <p:spPr>
           <a:xfrm>
-            <a:off x="7802684" y="2537460"/>
-            <a:ext cx="3840370" cy="704088"/>
+            <a:off x="7802684" y="2757224"/>
+            <a:ext cx="3840370" cy="264560"/>
           </a:xfrm>
           <a:prstGeom prst="rect">
             <a:avLst/>
@@ -33104,6 +34683,16 @@
               </a:lnSpc>
             </a:pPr>
             <a:r>
+              <a:rPr sz="800" b="1" i="0" dirty="0">
+                <a:solidFill>
+                  <a:srgbClr val="44495B"/>
+                </a:solidFill>
+                <a:latin typeface="Segoe UI"/>
+                <a:cs typeface="Segoe UI"/>
+              </a:rPr>
+              <a:t>An Agent Card </a:t>
+            </a:r>
+            <a:r>
               <a:rPr sz="800" b="0" i="0" dirty="0">
                 <a:solidFill>
                   <a:srgbClr val="44495B"/>
@@ -33111,7 +34700,7 @@
                 <a:latin typeface="Segoe UI"/>
                 <a:cs typeface="Segoe UI"/>
               </a:rPr>
-              <a:t>An Agent Card published at a well-known URI, declaring skills, capabilities, interfaces and security schemes.</a:t>
+              <a:t>published at a well-known URI, declaring skills, capabilities, interfaces and security schemes.</a:t>
             </a:r>
           </a:p>
         </p:txBody>
@@ -34070,15 +35659,22 @@
               </a:lnSpc>
             </a:pPr>
             <a:r>
-              <a:rPr sz="750" b="1" i="0" spc="110" dirty="0">
+              <a:rPr lang="en-US" sz="750" b="1" i="0" spc="110" dirty="0">
                 <a:solidFill>
                   <a:srgbClr val="44495B"/>
                 </a:solidFill>
                 <a:latin typeface="Segoe UI"/>
                 <a:cs typeface="Segoe UI"/>
               </a:rPr>
-              <a:t>YOUR PROJECT</a:t>
-            </a:r>
+              <a:t>CALLING PROJECT</a:t>
+            </a:r>
+            <a:endParaRPr sz="750" b="1" i="0" spc="110" dirty="0">
+              <a:solidFill>
+                <a:srgbClr val="44495B"/>
+              </a:solidFill>
+              <a:latin typeface="Segoe UI"/>
+              <a:cs typeface="Segoe UI"/>
+            </a:endParaRPr>
           </a:p>
         </p:txBody>
       </p:sp>
